--- a/05-functions/Python_Functions.pptx
+++ b/05-functions/Python_Functions.pptx
@@ -5,7 +5,7 @@
     <p:sldMasterId id="2147483648" r:id="rId1"/>
   </p:sldMasterIdLst>
   <p:notesMasterIdLst>
-    <p:notesMasterId r:id="rId15"/>
+    <p:notesMasterId r:id="rId13"/>
   </p:notesMasterIdLst>
   <p:sldIdLst>
     <p:sldId id="256" r:id="rId2"/>
@@ -14,13 +14,11 @@
     <p:sldId id="259" r:id="rId5"/>
     <p:sldId id="260" r:id="rId6"/>
     <p:sldId id="268" r:id="rId7"/>
-    <p:sldId id="269" r:id="rId8"/>
-    <p:sldId id="261" r:id="rId9"/>
-    <p:sldId id="262" r:id="rId10"/>
-    <p:sldId id="263" r:id="rId11"/>
-    <p:sldId id="264" r:id="rId12"/>
-    <p:sldId id="265" r:id="rId13"/>
-    <p:sldId id="266" r:id="rId14"/>
+    <p:sldId id="262" r:id="rId8"/>
+    <p:sldId id="263" r:id="rId9"/>
+    <p:sldId id="264" r:id="rId10"/>
+    <p:sldId id="265" r:id="rId11"/>
+    <p:sldId id="266" r:id="rId12"/>
   </p:sldIdLst>
   <p:sldSz cx="9144000" cy="5143500" type="screen16x9"/>
   <p:notesSz cx="5143500" cy="9144000"/>
@@ -483,174 +481,6 @@
             <a:fld id="{F7021451-1387-4CA6-816F-3879F97B5CBC}" type="slidenum">
               <a:rPr lang="en-US"/>
               <a:t>11</a:t>
-            </a:fld>
-            <a:endParaRPr lang="en-US"/>
-          </a:p>
-        </p:txBody>
-      </p:sp>
-    </p:spTree>
-    <p:extLst>
-      <p:ext uri="{BB962C8B-B14F-4D97-AF65-F5344CB8AC3E}">
-        <p14:creationId xmlns:p14="http://schemas.microsoft.com/office/powerpoint/2010/main" val="1024086991"/>
-      </p:ext>
-    </p:extLst>
-  </p:cSld>
-  <p:clrMapOvr>
-    <a:masterClrMapping/>
-  </p:clrMapOvr>
-</p:notes>
-</file>
-
-<file path=ppt/notesSlides/notesSlide12.xml><?xml version="1.0" encoding="utf-8"?>
-<p:notes xmlns:a="http://schemas.openxmlformats.org/drawingml/2006/main" xmlns:r="http://schemas.openxmlformats.org/officeDocument/2006/relationships" xmlns:p="http://schemas.openxmlformats.org/presentationml/2006/main">
-  <p:cSld>
-    <p:spTree>
-      <p:nvGrpSpPr>
-        <p:cNvPr id="1" name=""/>
-        <p:cNvGrpSpPr/>
-        <p:nvPr/>
-      </p:nvGrpSpPr>
-      <p:grpSpPr>
-        <a:xfrm>
-          <a:off x="0" y="0"/>
-          <a:ext cx="0" cy="0"/>
-          <a:chOff x="0" y="0"/>
-          <a:chExt cx="0" cy="0"/>
-        </a:xfrm>
-      </p:grpSpPr>
-      <p:sp>
-        <p:nvSpPr>
-          <p:cNvPr id="2" name="Slide Image Placeholder 1"/>
-          <p:cNvSpPr>
-            <a:spLocks noGrp="1" noRot="1" noChangeAspect="1"/>
-          </p:cNvSpPr>
-          <p:nvPr>
-            <p:ph type="sldImg"/>
-          </p:nvPr>
-        </p:nvSpPr>
-        <p:spPr/>
-      </p:sp>
-      <p:sp>
-        <p:nvSpPr>
-          <p:cNvPr id="3" name="Notes Placeholder 2"/>
-          <p:cNvSpPr>
-            <a:spLocks noGrp="1"/>
-          </p:cNvSpPr>
-          <p:nvPr>
-            <p:ph type="body" idx="1"/>
-          </p:nvPr>
-        </p:nvSpPr>
-        <p:spPr/>
-        <p:txBody>
-          <a:bodyPr/>
-          <a:lstStyle/>
-          <a:p>
-            <a:endParaRPr lang="en-US" dirty="0"/>
-          </a:p>
-        </p:txBody>
-      </p:sp>
-      <p:sp>
-        <p:nvSpPr>
-          <p:cNvPr id="4" name="Slide Number Placeholder 3"/>
-          <p:cNvSpPr>
-            <a:spLocks noGrp="1"/>
-          </p:cNvSpPr>
-          <p:nvPr>
-            <p:ph type="sldNum" sz="quarter" idx="10"/>
-          </p:nvPr>
-        </p:nvSpPr>
-        <p:spPr/>
-        <p:txBody>
-          <a:bodyPr/>
-          <a:lstStyle/>
-          <a:p>
-            <a:fld id="{F7021451-1387-4CA6-816F-3879F97B5CBC}" type="slidenum">
-              <a:rPr lang="en-US"/>
-              <a:t>12</a:t>
-            </a:fld>
-            <a:endParaRPr lang="en-US"/>
-          </a:p>
-        </p:txBody>
-      </p:sp>
-    </p:spTree>
-    <p:extLst>
-      <p:ext uri="{BB962C8B-B14F-4D97-AF65-F5344CB8AC3E}">
-        <p14:creationId xmlns:p14="http://schemas.microsoft.com/office/powerpoint/2010/main" val="1024086991"/>
-      </p:ext>
-    </p:extLst>
-  </p:cSld>
-  <p:clrMapOvr>
-    <a:masterClrMapping/>
-  </p:clrMapOvr>
-</p:notes>
-</file>
-
-<file path=ppt/notesSlides/notesSlide13.xml><?xml version="1.0" encoding="utf-8"?>
-<p:notes xmlns:a="http://schemas.openxmlformats.org/drawingml/2006/main" xmlns:r="http://schemas.openxmlformats.org/officeDocument/2006/relationships" xmlns:p="http://schemas.openxmlformats.org/presentationml/2006/main">
-  <p:cSld>
-    <p:spTree>
-      <p:nvGrpSpPr>
-        <p:cNvPr id="1" name=""/>
-        <p:cNvGrpSpPr/>
-        <p:nvPr/>
-      </p:nvGrpSpPr>
-      <p:grpSpPr>
-        <a:xfrm>
-          <a:off x="0" y="0"/>
-          <a:ext cx="0" cy="0"/>
-          <a:chOff x="0" y="0"/>
-          <a:chExt cx="0" cy="0"/>
-        </a:xfrm>
-      </p:grpSpPr>
-      <p:sp>
-        <p:nvSpPr>
-          <p:cNvPr id="2" name="Slide Image Placeholder 1"/>
-          <p:cNvSpPr>
-            <a:spLocks noGrp="1" noRot="1" noChangeAspect="1"/>
-          </p:cNvSpPr>
-          <p:nvPr>
-            <p:ph type="sldImg"/>
-          </p:nvPr>
-        </p:nvSpPr>
-        <p:spPr/>
-      </p:sp>
-      <p:sp>
-        <p:nvSpPr>
-          <p:cNvPr id="3" name="Notes Placeholder 2"/>
-          <p:cNvSpPr>
-            <a:spLocks noGrp="1"/>
-          </p:cNvSpPr>
-          <p:nvPr>
-            <p:ph type="body" idx="1"/>
-          </p:nvPr>
-        </p:nvSpPr>
-        <p:spPr/>
-        <p:txBody>
-          <a:bodyPr/>
-          <a:lstStyle/>
-          <a:p>
-            <a:endParaRPr lang="en-US" dirty="0"/>
-          </a:p>
-        </p:txBody>
-      </p:sp>
-      <p:sp>
-        <p:nvSpPr>
-          <p:cNvPr id="4" name="Slide Number Placeholder 3"/>
-          <p:cNvSpPr>
-            <a:spLocks noGrp="1"/>
-          </p:cNvSpPr>
-          <p:nvPr>
-            <p:ph type="sldNum" sz="quarter" idx="10"/>
-          </p:nvPr>
-        </p:nvSpPr>
-        <p:spPr/>
-        <p:txBody>
-          <a:bodyPr/>
-          <a:lstStyle/>
-          <a:p>
-            <a:fld id="{F7021451-1387-4CA6-816F-3879F97B5CBC}" type="slidenum">
-              <a:rPr lang="en-US"/>
-              <a:t>13</a:t>
             </a:fld>
             <a:endParaRPr lang="en-US"/>
           </a:p>
@@ -2226,1023 +2056,6 @@
 
 <file path=ppt/slides/slide10.xml><?xml version="1.0" encoding="utf-8"?>
 <p:sld xmlns:a="http://schemas.openxmlformats.org/drawingml/2006/main" xmlns:r="http://schemas.openxmlformats.org/officeDocument/2006/relationships" xmlns:p="http://schemas.openxmlformats.org/presentationml/2006/main">
-  <p:cSld name="Slide 8">
-    <p:bg>
-      <p:bgPr>
-        <a:solidFill>
-          <a:srgbClr val="0F1117"/>
-        </a:solidFill>
-        <a:effectLst/>
-      </p:bgPr>
-    </p:bg>
-    <p:spTree>
-      <p:nvGrpSpPr>
-        <p:cNvPr id="1" name=""/>
-        <p:cNvGrpSpPr/>
-        <p:nvPr/>
-      </p:nvGrpSpPr>
-      <p:grpSpPr>
-        <a:xfrm>
-          <a:off x="0" y="0"/>
-          <a:ext cx="0" cy="0"/>
-          <a:chOff x="0" y="0"/>
-          <a:chExt cx="0" cy="0"/>
-        </a:xfrm>
-      </p:grpSpPr>
-      <p:sp>
-        <p:nvSpPr>
-          <p:cNvPr id="2" name="Text 0"/>
-          <p:cNvSpPr/>
-          <p:nvPr/>
-        </p:nvSpPr>
-        <p:spPr>
-          <a:xfrm>
-            <a:off x="457200" y="274320"/>
-            <a:ext cx="8229600" cy="640080"/>
-          </a:xfrm>
-          <a:prstGeom prst="rect">
-            <a:avLst/>
-          </a:prstGeom>
-          <a:noFill/>
-          <a:ln/>
-        </p:spPr>
-        <p:txBody>
-          <a:bodyPr wrap="square" rtlCol="0" anchor="ctr"/>
-          <a:lstStyle/>
-          <a:p>
-            <a:pPr marL="0" indent="0" algn="l">
-              <a:buNone/>
-            </a:pPr>
-            <a:r>
-              <a:rPr lang="en-US" sz="3000" b="1" dirty="0">
-                <a:solidFill>
-                  <a:srgbClr val="F1F5F9"/>
-                </a:solidFill>
-                <a:latin typeface="Calibri" pitchFamily="34" charset="0"/>
-                <a:ea typeface="Calibri" pitchFamily="34" charset="-122"/>
-                <a:cs typeface="Calibri" pitchFamily="34" charset="-120"/>
-              </a:rPr>
-              <a:t>Stage 5 — *args (Variable Positional)</a:t>
-            </a:r>
-            <a:endParaRPr lang="en-US" sz="3000" dirty="0"/>
-          </a:p>
-        </p:txBody>
-      </p:sp>
-      <p:sp>
-        <p:nvSpPr>
-          <p:cNvPr id="3" name="Shape 1"/>
-          <p:cNvSpPr/>
-          <p:nvPr/>
-        </p:nvSpPr>
-        <p:spPr>
-          <a:xfrm>
-            <a:off x="457200" y="987552"/>
-            <a:ext cx="8229600" cy="36576"/>
-          </a:xfrm>
-          <a:prstGeom prst="rect">
-            <a:avLst/>
-          </a:prstGeom>
-          <a:solidFill>
-            <a:srgbClr val="34D399"/>
-          </a:solidFill>
-          <a:ln w="12700">
-            <a:solidFill>
-              <a:srgbClr val="34D399"/>
-            </a:solidFill>
-            <a:prstDash val="solid"/>
-          </a:ln>
-        </p:spPr>
-      </p:sp>
-      <p:sp>
-        <p:nvSpPr>
-          <p:cNvPr id="4" name="Text 2"/>
-          <p:cNvSpPr/>
-          <p:nvPr/>
-        </p:nvSpPr>
-        <p:spPr>
-          <a:xfrm>
-            <a:off x="457200" y="1143000"/>
-            <a:ext cx="8229600" cy="274320"/>
-          </a:xfrm>
-          <a:prstGeom prst="rect">
-            <a:avLst/>
-          </a:prstGeom>
-          <a:noFill/>
-          <a:ln/>
-        </p:spPr>
-        <p:txBody>
-          <a:bodyPr wrap="square" rtlCol="0" anchor="ctr"/>
-          <a:lstStyle/>
-          <a:p>
-            <a:pPr marL="0" indent="0">
-              <a:buNone/>
-            </a:pPr>
-            <a:r>
-              <a:rPr lang="en-US" sz="1300" i="1" dirty="0">
-                <a:solidFill>
-                  <a:srgbClr val="8B95A8"/>
-                </a:solidFill>
-                <a:latin typeface="Calibri" pitchFamily="34" charset="0"/>
-                <a:ea typeface="Calibri" pitchFamily="34" charset="-122"/>
-                <a:cs typeface="Calibri" pitchFamily="34" charset="-120"/>
-              </a:rPr>
-              <a:t>Problem: How many numbers will the user pass? We don't know in advance!</a:t>
-            </a:r>
-            <a:endParaRPr lang="en-US" sz="1300" dirty="0"/>
-          </a:p>
-        </p:txBody>
-      </p:sp>
-      <p:sp>
-        <p:nvSpPr>
-          <p:cNvPr id="5" name="Shape 3"/>
-          <p:cNvSpPr/>
-          <p:nvPr/>
-        </p:nvSpPr>
-        <p:spPr>
-          <a:xfrm>
-            <a:off x="457200" y="1463040"/>
-            <a:ext cx="8229600" cy="3246120"/>
-          </a:xfrm>
-          <a:prstGeom prst="rect">
-            <a:avLst/>
-          </a:prstGeom>
-          <a:solidFill>
-            <a:srgbClr val="161B22"/>
-          </a:solidFill>
-          <a:ln w="12700">
-            <a:solidFill>
-              <a:srgbClr val="4F9CF9"/>
-            </a:solidFill>
-            <a:prstDash val="solid"/>
-          </a:ln>
-        </p:spPr>
-      </p:sp>
-      <p:sp>
-        <p:nvSpPr>
-          <p:cNvPr id="6" name="Text 4"/>
-          <p:cNvSpPr/>
-          <p:nvPr/>
-        </p:nvSpPr>
-        <p:spPr>
-          <a:xfrm>
-            <a:off x="594360" y="1572768"/>
-            <a:ext cx="7955280" cy="3063240"/>
-          </a:xfrm>
-          <a:prstGeom prst="rect">
-            <a:avLst/>
-          </a:prstGeom>
-          <a:noFill/>
-          <a:ln/>
-        </p:spPr>
-        <p:txBody>
-          <a:bodyPr wrap="square" rtlCol="0" anchor="ctr"/>
-          <a:lstStyle/>
-          <a:p>
-            <a:pPr marL="0" indent="0">
-              <a:buNone/>
-            </a:pPr>
-            <a:r>
-              <a:rPr lang="en-US" sz="1200" dirty="0">
-                <a:solidFill>
-                  <a:srgbClr val="4F9CF9"/>
-                </a:solidFill>
-                <a:latin typeface="Consolas" pitchFamily="34" charset="0"/>
-                <a:ea typeface="Consolas" pitchFamily="34" charset="-122"/>
-                <a:cs typeface="Consolas" pitchFamily="34" charset="-120"/>
-              </a:rPr>
-              <a:t>def add_all(*numbers):          # * collects extras into a tuple</a:t>
-            </a:r>
-            <a:endParaRPr lang="en-US" sz="1200" dirty="0"/>
-          </a:p>
-          <a:p>
-            <a:pPr marL="0" indent="0">
-              <a:buNone/>
-            </a:pPr>
-            <a:r>
-              <a:rPr lang="en-US" sz="1200" dirty="0">
-                <a:solidFill>
-                  <a:srgbClr val="79C0FF"/>
-                </a:solidFill>
-                <a:latin typeface="Consolas" pitchFamily="34" charset="0"/>
-                <a:ea typeface="Consolas" pitchFamily="34" charset="-122"/>
-                <a:cs typeface="Consolas" pitchFamily="34" charset="-120"/>
-              </a:rPr>
-              <a:t>    print(type(numbers))        # &lt;class 'tuple'&gt;</a:t>
-            </a:r>
-            <a:endParaRPr lang="en-US" sz="1200" dirty="0"/>
-          </a:p>
-          <a:p>
-            <a:pPr marL="0" indent="0">
-              <a:buNone/>
-            </a:pPr>
-            <a:r>
-              <a:rPr lang="en-US" sz="1200" dirty="0">
-                <a:solidFill>
-                  <a:srgbClr val="4F9CF9"/>
-                </a:solidFill>
-                <a:latin typeface="Consolas" pitchFamily="34" charset="0"/>
-                <a:ea typeface="Consolas" pitchFamily="34" charset="-122"/>
-                <a:cs typeface="Consolas" pitchFamily="34" charset="-120"/>
-              </a:rPr>
-              <a:t>    return sum(numbers)</a:t>
-            </a:r>
-            <a:endParaRPr lang="en-US" sz="1200" dirty="0"/>
-          </a:p>
-          <a:p>
-            <a:pPr marL="0" indent="0">
-              <a:buNone/>
-            </a:pPr>
-            <a:endParaRPr lang="en-US" sz="1200" dirty="0"/>
-          </a:p>
-          <a:p>
-            <a:pPr marL="0" indent="0">
-              <a:buNone/>
-            </a:pPr>
-            <a:r>
-              <a:rPr lang="en-US" sz="1200" dirty="0">
-                <a:solidFill>
-                  <a:srgbClr val="79C0FF"/>
-                </a:solidFill>
-                <a:latin typeface="Consolas" pitchFamily="34" charset="0"/>
-                <a:ea typeface="Consolas" pitchFamily="34" charset="-122"/>
-                <a:cs typeface="Consolas" pitchFamily="34" charset="-120"/>
-              </a:rPr>
-              <a:t>print(add_all(1, 2))            # → 3</a:t>
-            </a:r>
-            <a:endParaRPr lang="en-US" sz="1200" dirty="0"/>
-          </a:p>
-          <a:p>
-            <a:pPr marL="0" indent="0">
-              <a:buNone/>
-            </a:pPr>
-            <a:r>
-              <a:rPr lang="en-US" sz="1200" dirty="0">
-                <a:solidFill>
-                  <a:srgbClr val="79C0FF"/>
-                </a:solidFill>
-                <a:latin typeface="Consolas" pitchFamily="34" charset="0"/>
-                <a:ea typeface="Consolas" pitchFamily="34" charset="-122"/>
-                <a:cs typeface="Consolas" pitchFamily="34" charset="-120"/>
-              </a:rPr>
-              <a:t>print(add_all(1, 2, 3, 4, 5))  # → 15</a:t>
-            </a:r>
-            <a:endParaRPr lang="en-US" sz="1200" dirty="0"/>
-          </a:p>
-          <a:p>
-            <a:pPr marL="0" indent="0">
-              <a:buNone/>
-            </a:pPr>
-            <a:r>
-              <a:rPr lang="en-US" sz="1200" dirty="0">
-                <a:solidFill>
-                  <a:srgbClr val="79C0FF"/>
-                </a:solidFill>
-                <a:latin typeface="Consolas" pitchFamily="34" charset="0"/>
-                <a:ea typeface="Consolas" pitchFamily="34" charset="-122"/>
-                <a:cs typeface="Consolas" pitchFamily="34" charset="-120"/>
-              </a:rPr>
-              <a:t>print(add_all(10, 20, 30))      # → 60</a:t>
-            </a:r>
-            <a:endParaRPr lang="en-US" sz="1200" dirty="0"/>
-          </a:p>
-          <a:p>
-            <a:pPr marL="0" indent="0">
-              <a:buNone/>
-            </a:pPr>
-            <a:endParaRPr lang="en-US" sz="1200" dirty="0"/>
-          </a:p>
-          <a:p>
-            <a:pPr marL="0" indent="0">
-              <a:buNone/>
-            </a:pPr>
-            <a:r>
-              <a:rPr lang="en-US" sz="1200" dirty="0">
-                <a:solidFill>
-                  <a:srgbClr val="6A9955"/>
-                </a:solidFill>
-                <a:latin typeface="Consolas" pitchFamily="34" charset="0"/>
-                <a:ea typeface="Consolas" pitchFamily="34" charset="-122"/>
-                <a:cs typeface="Consolas" pitchFamily="34" charset="-120"/>
-              </a:rPr>
-              <a:t># Real-world: an order system</a:t>
-            </a:r>
-            <a:endParaRPr lang="en-US" sz="1200" dirty="0"/>
-          </a:p>
-          <a:p>
-            <a:pPr marL="0" indent="0">
-              <a:buNone/>
-            </a:pPr>
-            <a:r>
-              <a:rPr lang="en-US" sz="1200" dirty="0">
-                <a:solidFill>
-                  <a:srgbClr val="4F9CF9"/>
-                </a:solidFill>
-                <a:latin typeface="Consolas" pitchFamily="34" charset="0"/>
-                <a:ea typeface="Consolas" pitchFamily="34" charset="-122"/>
-                <a:cs typeface="Consolas" pitchFamily="34" charset="-120"/>
-              </a:rPr>
-              <a:t>def describe_order(*items):</a:t>
-            </a:r>
-            <a:endParaRPr lang="en-US" sz="1200" dirty="0"/>
-          </a:p>
-          <a:p>
-            <a:pPr marL="0" indent="0">
-              <a:buNone/>
-            </a:pPr>
-            <a:r>
-              <a:rPr lang="en-US" sz="1200" dirty="0">
-                <a:solidFill>
-                  <a:srgbClr val="79C0FF"/>
-                </a:solidFill>
-                <a:latin typeface="Consolas" pitchFamily="34" charset="0"/>
-                <a:ea typeface="Consolas" pitchFamily="34" charset="-122"/>
-                <a:cs typeface="Consolas" pitchFamily="34" charset="-120"/>
-              </a:rPr>
-              <a:t>    for item in items:</a:t>
-            </a:r>
-            <a:endParaRPr lang="en-US" sz="1200" dirty="0"/>
-          </a:p>
-          <a:p>
-            <a:pPr marL="0" indent="0">
-              <a:buNone/>
-            </a:pPr>
-            <a:r>
-              <a:rPr lang="en-US" sz="1200" dirty="0">
-                <a:solidFill>
-                  <a:srgbClr val="79C0FF"/>
-                </a:solidFill>
-                <a:latin typeface="Consolas" pitchFamily="34" charset="0"/>
-                <a:ea typeface="Consolas" pitchFamily="34" charset="-122"/>
-                <a:cs typeface="Consolas" pitchFamily="34" charset="-120"/>
-              </a:rPr>
-              <a:t>        print(f'  - {item}')</a:t>
-            </a:r>
-            <a:endParaRPr lang="en-US" sz="1200" dirty="0"/>
-          </a:p>
-          <a:p>
-            <a:pPr marL="0" indent="0">
-              <a:buNone/>
-            </a:pPr>
-            <a:endParaRPr lang="en-US" sz="1200" dirty="0"/>
-          </a:p>
-          <a:p>
-            <a:pPr marL="0" indent="0">
-              <a:buNone/>
-            </a:pPr>
-            <a:r>
-              <a:rPr lang="en-US" sz="1200" dirty="0">
-                <a:solidFill>
-                  <a:srgbClr val="79C0FF"/>
-                </a:solidFill>
-                <a:latin typeface="Consolas" pitchFamily="34" charset="0"/>
-                <a:ea typeface="Consolas" pitchFamily="34" charset="-122"/>
-                <a:cs typeface="Consolas" pitchFamily="34" charset="-120"/>
-              </a:rPr>
-              <a:t>describe_order('Pizza', 'Coke', 'Garlic Bread')</a:t>
-            </a:r>
-            <a:endParaRPr lang="en-US" sz="1200" dirty="0"/>
-          </a:p>
-        </p:txBody>
-      </p:sp>
-      <p:sp>
-        <p:nvSpPr>
-          <p:cNvPr id="7" name="Shape 5"/>
-          <p:cNvSpPr/>
-          <p:nvPr/>
-        </p:nvSpPr>
-        <p:spPr>
-          <a:xfrm>
-            <a:off x="457200" y="4800600"/>
-            <a:ext cx="8229600" cy="182880"/>
-          </a:xfrm>
-          <a:prstGeom prst="rect">
-            <a:avLst/>
-          </a:prstGeom>
-          <a:solidFill>
-            <a:srgbClr val="1A1D27"/>
-          </a:solidFill>
-          <a:ln w="12700">
-            <a:solidFill>
-              <a:srgbClr val="34D399"/>
-            </a:solidFill>
-            <a:prstDash val="solid"/>
-          </a:ln>
-        </p:spPr>
-      </p:sp>
-      <p:sp>
-        <p:nvSpPr>
-          <p:cNvPr id="8" name="Text 6"/>
-          <p:cNvSpPr/>
-          <p:nvPr/>
-        </p:nvSpPr>
-        <p:spPr>
-          <a:xfrm>
-            <a:off x="640080" y="4809744"/>
-            <a:ext cx="7863840" cy="164592"/>
-          </a:xfrm>
-          <a:prstGeom prst="rect">
-            <a:avLst/>
-          </a:prstGeom>
-          <a:noFill/>
-          <a:ln/>
-        </p:spPr>
-        <p:txBody>
-          <a:bodyPr wrap="square" rtlCol="0" anchor="ctr"/>
-          <a:lstStyle/>
-          <a:p>
-            <a:pPr marL="0" indent="0">
-              <a:buNone/>
-            </a:pPr>
-            <a:r>
-              <a:rPr lang="en-US" sz="1100" dirty="0">
-                <a:solidFill>
-                  <a:srgbClr val="34D399"/>
-                </a:solidFill>
-                <a:latin typeface="Calibri" pitchFamily="34" charset="0"/>
-                <a:ea typeface="Calibri" pitchFamily="34" charset="-122"/>
-                <a:cs typeface="Calibri" pitchFamily="34" charset="-120"/>
-              </a:rPr>
-              <a:t>💡  *args is just a TUPLE. The * is the collector. You can loop it, index it — anything you do with tuples.</a:t>
-            </a:r>
-            <a:endParaRPr lang="en-US" sz="1100" dirty="0"/>
-          </a:p>
-        </p:txBody>
-      </p:sp>
-    </p:spTree>
-  </p:cSld>
-  <p:clrMapOvr>
-    <a:masterClrMapping/>
-  </p:clrMapOvr>
-</p:sld>
-</file>
-
-<file path=ppt/slides/slide11.xml><?xml version="1.0" encoding="utf-8"?>
-<p:sld xmlns:a="http://schemas.openxmlformats.org/drawingml/2006/main" xmlns:r="http://schemas.openxmlformats.org/officeDocument/2006/relationships" xmlns:p="http://schemas.openxmlformats.org/presentationml/2006/main">
-  <p:cSld name="Slide 9">
-    <p:bg>
-      <p:bgPr>
-        <a:solidFill>
-          <a:srgbClr val="0F1117"/>
-        </a:solidFill>
-        <a:effectLst/>
-      </p:bgPr>
-    </p:bg>
-    <p:spTree>
-      <p:nvGrpSpPr>
-        <p:cNvPr id="1" name=""/>
-        <p:cNvGrpSpPr/>
-        <p:nvPr/>
-      </p:nvGrpSpPr>
-      <p:grpSpPr>
-        <a:xfrm>
-          <a:off x="0" y="0"/>
-          <a:ext cx="0" cy="0"/>
-          <a:chOff x="0" y="0"/>
-          <a:chExt cx="0" cy="0"/>
-        </a:xfrm>
-      </p:grpSpPr>
-      <p:sp>
-        <p:nvSpPr>
-          <p:cNvPr id="2" name="Text 0"/>
-          <p:cNvSpPr/>
-          <p:nvPr/>
-        </p:nvSpPr>
-        <p:spPr>
-          <a:xfrm>
-            <a:off x="457200" y="274320"/>
-            <a:ext cx="8229600" cy="640080"/>
-          </a:xfrm>
-          <a:prstGeom prst="rect">
-            <a:avLst/>
-          </a:prstGeom>
-          <a:noFill/>
-          <a:ln/>
-        </p:spPr>
-        <p:txBody>
-          <a:bodyPr wrap="square" rtlCol="0" anchor="ctr"/>
-          <a:lstStyle/>
-          <a:p>
-            <a:pPr marL="0" indent="0" algn="l">
-              <a:buNone/>
-            </a:pPr>
-            <a:r>
-              <a:rPr lang="en-US" sz="3000" b="1" dirty="0">
-                <a:solidFill>
-                  <a:srgbClr val="F1F5F9"/>
-                </a:solidFill>
-                <a:latin typeface="Calibri" pitchFamily="34" charset="0"/>
-                <a:ea typeface="Calibri" pitchFamily="34" charset="-122"/>
-                <a:cs typeface="Calibri" pitchFamily="34" charset="-120"/>
-              </a:rPr>
-              <a:t>Stage 6 — **kwargs (Variable Keyword)</a:t>
-            </a:r>
-            <a:endParaRPr lang="en-US" sz="3000" dirty="0"/>
-          </a:p>
-        </p:txBody>
-      </p:sp>
-      <p:sp>
-        <p:nvSpPr>
-          <p:cNvPr id="3" name="Shape 1"/>
-          <p:cNvSpPr/>
-          <p:nvPr/>
-        </p:nvSpPr>
-        <p:spPr>
-          <a:xfrm>
-            <a:off x="457200" y="987552"/>
-            <a:ext cx="8229600" cy="36576"/>
-          </a:xfrm>
-          <a:prstGeom prst="rect">
-            <a:avLst/>
-          </a:prstGeom>
-          <a:solidFill>
-            <a:srgbClr val="A78BFA"/>
-          </a:solidFill>
-          <a:ln w="12700">
-            <a:solidFill>
-              <a:srgbClr val="A78BFA"/>
-            </a:solidFill>
-            <a:prstDash val="solid"/>
-          </a:ln>
-        </p:spPr>
-      </p:sp>
-      <p:sp>
-        <p:nvSpPr>
-          <p:cNvPr id="4" name="Text 2"/>
-          <p:cNvSpPr/>
-          <p:nvPr/>
-        </p:nvSpPr>
-        <p:spPr>
-          <a:xfrm>
-            <a:off x="457200" y="1143000"/>
-            <a:ext cx="8229600" cy="274320"/>
-          </a:xfrm>
-          <a:prstGeom prst="rect">
-            <a:avLst/>
-          </a:prstGeom>
-          <a:noFill/>
-          <a:ln/>
-        </p:spPr>
-        <p:txBody>
-          <a:bodyPr wrap="square" rtlCol="0" anchor="ctr"/>
-          <a:lstStyle/>
-          <a:p>
-            <a:pPr marL="0" indent="0">
-              <a:buNone/>
-            </a:pPr>
-            <a:r>
-              <a:rPr lang="en-US" sz="1300" i="1" dirty="0">
-                <a:solidFill>
-                  <a:srgbClr val="8B95A8"/>
-                </a:solidFill>
-                <a:latin typeface="Calibri" pitchFamily="34" charset="0"/>
-                <a:ea typeface="Calibri" pitchFamily="34" charset="-122"/>
-                <a:cs typeface="Calibri" pitchFamily="34" charset="-120"/>
-              </a:rPr>
-              <a:t>Problem: What if we don't know what named data will come in?</a:t>
-            </a:r>
-            <a:endParaRPr lang="en-US" sz="1300" dirty="0"/>
-          </a:p>
-        </p:txBody>
-      </p:sp>
-      <p:sp>
-        <p:nvSpPr>
-          <p:cNvPr id="5" name="Shape 3"/>
-          <p:cNvSpPr/>
-          <p:nvPr/>
-        </p:nvSpPr>
-        <p:spPr>
-          <a:xfrm>
-            <a:off x="457200" y="1463040"/>
-            <a:ext cx="8229600" cy="2651760"/>
-          </a:xfrm>
-          <a:prstGeom prst="rect">
-            <a:avLst/>
-          </a:prstGeom>
-          <a:solidFill>
-            <a:srgbClr val="161B22"/>
-          </a:solidFill>
-          <a:ln w="12700">
-            <a:solidFill>
-              <a:srgbClr val="4F9CF9"/>
-            </a:solidFill>
-            <a:prstDash val="solid"/>
-          </a:ln>
-        </p:spPr>
-      </p:sp>
-      <p:sp>
-        <p:nvSpPr>
-          <p:cNvPr id="6" name="Text 4"/>
-          <p:cNvSpPr/>
-          <p:nvPr/>
-        </p:nvSpPr>
-        <p:spPr>
-          <a:xfrm>
-            <a:off x="594360" y="1572768"/>
-            <a:ext cx="7955280" cy="2468880"/>
-          </a:xfrm>
-          <a:prstGeom prst="rect">
-            <a:avLst/>
-          </a:prstGeom>
-          <a:noFill/>
-          <a:ln/>
-        </p:spPr>
-        <p:txBody>
-          <a:bodyPr wrap="square" rtlCol="0" anchor="ctr"/>
-          <a:lstStyle/>
-          <a:p>
-            <a:pPr marL="0" indent="0">
-              <a:buNone/>
-            </a:pPr>
-            <a:r>
-              <a:rPr lang="en-US" sz="1200" dirty="0">
-                <a:solidFill>
-                  <a:srgbClr val="4F9CF9"/>
-                </a:solidFill>
-                <a:latin typeface="Consolas" pitchFamily="34" charset="0"/>
-                <a:ea typeface="Consolas" pitchFamily="34" charset="-122"/>
-                <a:cs typeface="Consolas" pitchFamily="34" charset="-120"/>
-              </a:rPr>
-              <a:t>def build_profile(**info):        # ** collects into a dict</a:t>
-            </a:r>
-            <a:endParaRPr lang="en-US" sz="1200" dirty="0"/>
-          </a:p>
-          <a:p>
-            <a:pPr marL="0" indent="0">
-              <a:buNone/>
-            </a:pPr>
-            <a:r>
-              <a:rPr lang="en-US" sz="1200" dirty="0">
-                <a:solidFill>
-                  <a:srgbClr val="79C0FF"/>
-                </a:solidFill>
-                <a:latin typeface="Consolas" pitchFamily="34" charset="0"/>
-                <a:ea typeface="Consolas" pitchFamily="34" charset="-122"/>
-                <a:cs typeface="Consolas" pitchFamily="34" charset="-120"/>
-              </a:rPr>
-              <a:t>    print(type(info))             # &lt;class 'dict'&gt;</a:t>
-            </a:r>
-            <a:endParaRPr lang="en-US" sz="1200" dirty="0"/>
-          </a:p>
-          <a:p>
-            <a:pPr marL="0" indent="0">
-              <a:buNone/>
-            </a:pPr>
-            <a:r>
-              <a:rPr lang="en-US" sz="1200" dirty="0">
-                <a:solidFill>
-                  <a:srgbClr val="79C0FF"/>
-                </a:solidFill>
-                <a:latin typeface="Consolas" pitchFamily="34" charset="0"/>
-                <a:ea typeface="Consolas" pitchFamily="34" charset="-122"/>
-                <a:cs typeface="Consolas" pitchFamily="34" charset="-120"/>
-              </a:rPr>
-              <a:t>    for key, value in info.items():</a:t>
-            </a:r>
-            <a:endParaRPr lang="en-US" sz="1200" dirty="0"/>
-          </a:p>
-          <a:p>
-            <a:pPr marL="0" indent="0">
-              <a:buNone/>
-            </a:pPr>
-            <a:r>
-              <a:rPr lang="en-US" sz="1200" dirty="0">
-                <a:solidFill>
-                  <a:srgbClr val="79C0FF"/>
-                </a:solidFill>
-                <a:latin typeface="Consolas" pitchFamily="34" charset="0"/>
-                <a:ea typeface="Consolas" pitchFamily="34" charset="-122"/>
-                <a:cs typeface="Consolas" pitchFamily="34" charset="-120"/>
-              </a:rPr>
-              <a:t>        print(f'{key}: {value}')</a:t>
-            </a:r>
-            <a:endParaRPr lang="en-US" sz="1200" dirty="0"/>
-          </a:p>
-          <a:p>
-            <a:pPr marL="0" indent="0">
-              <a:buNone/>
-            </a:pPr>
-            <a:endParaRPr lang="en-US" sz="1200" dirty="0"/>
-          </a:p>
-          <a:p>
-            <a:pPr marL="0" indent="0">
-              <a:buNone/>
-            </a:pPr>
-            <a:r>
-              <a:rPr lang="en-US" sz="1200" dirty="0">
-                <a:solidFill>
-                  <a:srgbClr val="79C0FF"/>
-                </a:solidFill>
-                <a:latin typeface="Consolas" pitchFamily="34" charset="0"/>
-                <a:ea typeface="Consolas" pitchFamily="34" charset="-122"/>
-                <a:cs typeface="Consolas" pitchFamily="34" charset="-120"/>
-              </a:rPr>
-              <a:t>build_profile(name='Alice', age=25, city='Bengaluru', hobby='Chess')</a:t>
-            </a:r>
-            <a:endParaRPr lang="en-US" sz="1200" dirty="0"/>
-          </a:p>
-          <a:p>
-            <a:pPr marL="0" indent="0">
-              <a:buNone/>
-            </a:pPr>
-            <a:r>
-              <a:rPr lang="en-US" sz="1200" dirty="0">
-                <a:solidFill>
-                  <a:srgbClr val="6A9955"/>
-                </a:solidFill>
-                <a:latin typeface="Consolas" pitchFamily="34" charset="0"/>
-                <a:ea typeface="Consolas" pitchFamily="34" charset="-122"/>
-                <a:cs typeface="Consolas" pitchFamily="34" charset="-120"/>
-              </a:rPr>
-              <a:t># name: Alice</a:t>
-            </a:r>
-            <a:endParaRPr lang="en-US" sz="1200" dirty="0"/>
-          </a:p>
-          <a:p>
-            <a:pPr marL="0" indent="0">
-              <a:buNone/>
-            </a:pPr>
-            <a:r>
-              <a:rPr lang="en-US" sz="1200" dirty="0">
-                <a:solidFill>
-                  <a:srgbClr val="6A9955"/>
-                </a:solidFill>
-                <a:latin typeface="Consolas" pitchFamily="34" charset="0"/>
-                <a:ea typeface="Consolas" pitchFamily="34" charset="-122"/>
-                <a:cs typeface="Consolas" pitchFamily="34" charset="-120"/>
-              </a:rPr>
-              <a:t># age: 25</a:t>
-            </a:r>
-            <a:endParaRPr lang="en-US" sz="1200" dirty="0"/>
-          </a:p>
-          <a:p>
-            <a:pPr marL="0" indent="0">
-              <a:buNone/>
-            </a:pPr>
-            <a:r>
-              <a:rPr lang="en-US" sz="1200" dirty="0">
-                <a:solidFill>
-                  <a:srgbClr val="6A9955"/>
-                </a:solidFill>
-                <a:latin typeface="Consolas" pitchFamily="34" charset="0"/>
-                <a:ea typeface="Consolas" pitchFamily="34" charset="-122"/>
-                <a:cs typeface="Consolas" pitchFamily="34" charset="-120"/>
-              </a:rPr>
-              <a:t># city: Bengaluru</a:t>
-            </a:r>
-            <a:endParaRPr lang="en-US" sz="1200" dirty="0"/>
-          </a:p>
-          <a:p>
-            <a:pPr marL="0" indent="0">
-              <a:buNone/>
-            </a:pPr>
-            <a:r>
-              <a:rPr lang="en-US" sz="1200" dirty="0">
-                <a:solidFill>
-                  <a:srgbClr val="6A9955"/>
-                </a:solidFill>
-                <a:latin typeface="Consolas" pitchFamily="34" charset="0"/>
-                <a:ea typeface="Consolas" pitchFamily="34" charset="-122"/>
-                <a:cs typeface="Consolas" pitchFamily="34" charset="-120"/>
-              </a:rPr>
-              <a:t># hobby: Chess</a:t>
-            </a:r>
-            <a:endParaRPr lang="en-US" sz="1200" dirty="0"/>
-          </a:p>
-        </p:txBody>
-      </p:sp>
-      <p:sp>
-        <p:nvSpPr>
-          <p:cNvPr id="7" name="Shape 5"/>
-          <p:cNvSpPr/>
-          <p:nvPr/>
-        </p:nvSpPr>
-        <p:spPr>
-          <a:xfrm>
-            <a:off x="457200" y="4206240"/>
-            <a:ext cx="4114800" cy="822960"/>
-          </a:xfrm>
-          <a:prstGeom prst="rect">
-            <a:avLst/>
-          </a:prstGeom>
-          <a:solidFill>
-            <a:srgbClr val="1A1D27"/>
-          </a:solidFill>
-          <a:ln w="12700">
-            <a:solidFill>
-              <a:srgbClr val="A78BFA"/>
-            </a:solidFill>
-            <a:prstDash val="solid"/>
-          </a:ln>
-        </p:spPr>
-      </p:sp>
-      <p:sp>
-        <p:nvSpPr>
-          <p:cNvPr id="8" name="Text 6"/>
-          <p:cNvSpPr/>
-          <p:nvPr/>
-        </p:nvSpPr>
-        <p:spPr>
-          <a:xfrm>
-            <a:off x="594360" y="4233672"/>
-            <a:ext cx="3840480" cy="256032"/>
-          </a:xfrm>
-          <a:prstGeom prst="rect">
-            <a:avLst/>
-          </a:prstGeom>
-          <a:noFill/>
-          <a:ln/>
-        </p:spPr>
-        <p:txBody>
-          <a:bodyPr wrap="square" rtlCol="0" anchor="ctr"/>
-          <a:lstStyle/>
-          <a:p>
-            <a:pPr marL="0" indent="0">
-              <a:buNone/>
-            </a:pPr>
-            <a:r>
-              <a:rPr lang="en-US" sz="1200" b="1" dirty="0">
-                <a:solidFill>
-                  <a:srgbClr val="A78BFA"/>
-                </a:solidFill>
-                <a:latin typeface="Calibri" pitchFamily="34" charset="0"/>
-                <a:ea typeface="Calibri" pitchFamily="34" charset="-122"/>
-                <a:cs typeface="Calibri" pitchFamily="34" charset="-120"/>
-              </a:rPr>
-              <a:t>📋  Real-world analogy</a:t>
-            </a:r>
-            <a:endParaRPr lang="en-US" sz="1200" dirty="0"/>
-          </a:p>
-        </p:txBody>
-      </p:sp>
-      <p:sp>
-        <p:nvSpPr>
-          <p:cNvPr id="9" name="Text 7"/>
-          <p:cNvSpPr/>
-          <p:nvPr/>
-        </p:nvSpPr>
-        <p:spPr>
-          <a:xfrm>
-            <a:off x="594360" y="4507992"/>
-            <a:ext cx="3840480" cy="457200"/>
-          </a:xfrm>
-          <a:prstGeom prst="rect">
-            <a:avLst/>
-          </a:prstGeom>
-          <a:noFill/>
-          <a:ln/>
-        </p:spPr>
-        <p:txBody>
-          <a:bodyPr wrap="square" rtlCol="0" anchor="ctr"/>
-          <a:lstStyle/>
-          <a:p>
-            <a:pPr marL="0" indent="0">
-              <a:buNone/>
-            </a:pPr>
-            <a:r>
-              <a:rPr lang="en-US" sz="1100" dirty="0">
-                <a:solidFill>
-                  <a:srgbClr val="F1F5F9"/>
-                </a:solidFill>
-                <a:latin typeface="Calibri" pitchFamily="34" charset="0"/>
-                <a:ea typeface="Calibri" pitchFamily="34" charset="-122"/>
-                <a:cs typeface="Calibri" pitchFamily="34" charset="-120"/>
-              </a:rPr>
-              <a:t>Like a form where you can add ANY fields — name, LinkedIn, GitHub, address — whatever you want. **kwargs is that flexible form.</a:t>
-            </a:r>
-            <a:endParaRPr lang="en-US" sz="1100" dirty="0"/>
-          </a:p>
-        </p:txBody>
-      </p:sp>
-      <p:sp>
-        <p:nvSpPr>
-          <p:cNvPr id="10" name="Shape 8"/>
-          <p:cNvSpPr/>
-          <p:nvPr/>
-        </p:nvSpPr>
-        <p:spPr>
-          <a:xfrm>
-            <a:off x="4754880" y="4206240"/>
-            <a:ext cx="3931920" cy="822960"/>
-          </a:xfrm>
-          <a:prstGeom prst="rect">
-            <a:avLst/>
-          </a:prstGeom>
-          <a:solidFill>
-            <a:srgbClr val="1A1D27"/>
-          </a:solidFill>
-          <a:ln w="12700">
-            <a:solidFill>
-              <a:srgbClr val="34D399"/>
-            </a:solidFill>
-            <a:prstDash val="solid"/>
-          </a:ln>
-        </p:spPr>
-      </p:sp>
-      <p:sp>
-        <p:nvSpPr>
-          <p:cNvPr id="11" name="Text 9"/>
-          <p:cNvSpPr/>
-          <p:nvPr/>
-        </p:nvSpPr>
-        <p:spPr>
-          <a:xfrm>
-            <a:off x="4892040" y="4233672"/>
-            <a:ext cx="3657600" cy="256032"/>
-          </a:xfrm>
-          <a:prstGeom prst="rect">
-            <a:avLst/>
-          </a:prstGeom>
-          <a:noFill/>
-          <a:ln/>
-        </p:spPr>
-        <p:txBody>
-          <a:bodyPr wrap="square" rtlCol="0" anchor="ctr"/>
-          <a:lstStyle/>
-          <a:p>
-            <a:pPr marL="0" indent="0">
-              <a:buNone/>
-            </a:pPr>
-            <a:r>
-              <a:rPr lang="en-US" sz="1200" b="1" dirty="0">
-                <a:solidFill>
-                  <a:srgbClr val="34D399"/>
-                </a:solidFill>
-                <a:latin typeface="Calibri" pitchFamily="34" charset="0"/>
-                <a:ea typeface="Calibri" pitchFamily="34" charset="-122"/>
-                <a:cs typeface="Calibri" pitchFamily="34" charset="-120"/>
-              </a:rPr>
-              <a:t>🔑  Key difference</a:t>
-            </a:r>
-            <a:endParaRPr lang="en-US" sz="1200" dirty="0"/>
-          </a:p>
-        </p:txBody>
-      </p:sp>
-      <p:sp>
-        <p:nvSpPr>
-          <p:cNvPr id="12" name="Text 10"/>
-          <p:cNvSpPr/>
-          <p:nvPr/>
-        </p:nvSpPr>
-        <p:spPr>
-          <a:xfrm>
-            <a:off x="4892040" y="4507992"/>
-            <a:ext cx="3657600" cy="457200"/>
-          </a:xfrm>
-          <a:prstGeom prst="rect">
-            <a:avLst/>
-          </a:prstGeom>
-          <a:noFill/>
-          <a:ln/>
-        </p:spPr>
-        <p:txBody>
-          <a:bodyPr wrap="square" rtlCol="0" anchor="ctr"/>
-          <a:lstStyle/>
-          <a:p>
-            <a:pPr marL="0" indent="0">
-              <a:buNone/>
-            </a:pPr>
-            <a:r>
-              <a:rPr lang="en-US" sz="1050" dirty="0">
-                <a:solidFill>
-                  <a:srgbClr val="79C0FF"/>
-                </a:solidFill>
-                <a:latin typeface="Consolas" pitchFamily="34" charset="0"/>
-                <a:ea typeface="Consolas" pitchFamily="34" charset="-122"/>
-                <a:cs typeface="Consolas" pitchFamily="34" charset="-120"/>
-              </a:rPr>
-              <a:t>*args     → unknown COUNT of values    → TUPLE</a:t>
-            </a:r>
-            <a:endParaRPr lang="en-US" sz="1050" dirty="0"/>
-          </a:p>
-          <a:p>
-            <a:pPr marL="0" indent="0">
-              <a:buNone/>
-            </a:pPr>
-            <a:r>
-              <a:rPr lang="en-US" sz="1050" dirty="0">
-                <a:solidFill>
-                  <a:srgbClr val="A78BFA"/>
-                </a:solidFill>
-                <a:latin typeface="Consolas" pitchFamily="34" charset="0"/>
-                <a:ea typeface="Consolas" pitchFamily="34" charset="-122"/>
-                <a:cs typeface="Consolas" pitchFamily="34" charset="-120"/>
-              </a:rPr>
-              <a:t>**kwargs → unknown NAME+VALUE pairs  → DICT</a:t>
-            </a:r>
-            <a:endParaRPr lang="en-US" sz="1050" dirty="0"/>
-          </a:p>
-        </p:txBody>
-      </p:sp>
-    </p:spTree>
-  </p:cSld>
-  <p:clrMapOvr>
-    <a:masterClrMapping/>
-  </p:clrMapOvr>
-</p:sld>
-</file>
-
-<file path=ppt/slides/slide12.xml><?xml version="1.0" encoding="utf-8"?>
-<p:sld xmlns:a="http://schemas.openxmlformats.org/drawingml/2006/main" xmlns:r="http://schemas.openxmlformats.org/officeDocument/2006/relationships" xmlns:p="http://schemas.openxmlformats.org/presentationml/2006/main">
   <p:cSld name="Slide 10">
     <p:bg>
       <p:bgPr>
@@ -3890,7 +2703,7 @@
 </p:sld>
 </file>
 
-<file path=ppt/slides/slide13.xml><?xml version="1.0" encoding="utf-8"?>
+<file path=ppt/slides/slide11.xml><?xml version="1.0" encoding="utf-8"?>
 <p:sld xmlns:a="http://schemas.openxmlformats.org/drawingml/2006/main" xmlns:r="http://schemas.openxmlformats.org/officeDocument/2006/relationships" xmlns:p="http://schemas.openxmlformats.org/presentationml/2006/main">
   <p:cSld name="Slide 11">
     <p:bg>
@@ -10114,2579 +8927,6 @@
 
 <file path=ppt/slides/slide7.xml><?xml version="1.0" encoding="utf-8"?>
 <p:sld xmlns:a="http://schemas.openxmlformats.org/drawingml/2006/main" xmlns:r="http://schemas.openxmlformats.org/officeDocument/2006/relationships" xmlns:p="http://schemas.openxmlformats.org/presentationml/2006/main">
-  <p:cSld>
-    <p:bg>
-      <p:bgPr>
-        <a:solidFill>
-          <a:srgbClr val="002060"/>
-        </a:solidFill>
-        <a:effectLst/>
-      </p:bgPr>
-    </p:bg>
-    <p:spTree>
-      <p:nvGrpSpPr>
-        <p:cNvPr id="1" name=""/>
-        <p:cNvGrpSpPr/>
-        <p:nvPr/>
-      </p:nvGrpSpPr>
-      <p:grpSpPr>
-        <a:xfrm>
-          <a:off x="0" y="0"/>
-          <a:ext cx="0" cy="0"/>
-          <a:chOff x="0" y="0"/>
-          <a:chExt cx="0" cy="0"/>
-        </a:xfrm>
-      </p:grpSpPr>
-      <p:sp>
-        <p:nvSpPr>
-          <p:cNvPr id="2" name="Text 0"/>
-          <p:cNvSpPr/>
-          <p:nvPr/>
-        </p:nvSpPr>
-        <p:spPr>
-          <a:xfrm>
-            <a:off x="457200" y="256032"/>
-            <a:ext cx="8229600" cy="566928"/>
-          </a:xfrm>
-          <a:prstGeom prst="rect">
-            <a:avLst/>
-          </a:prstGeom>
-          <a:noFill/>
-          <a:ln/>
-        </p:spPr>
-        <p:txBody>
-          <a:bodyPr wrap="square" rtlCol="0" anchor="ctr"/>
-          <a:lstStyle/>
-          <a:p>
-            <a:pPr marL="0" indent="0" algn="l">
-              <a:buNone/>
-            </a:pPr>
-            <a:r>
-              <a:rPr lang="en-US" sz="2800" b="1" dirty="0">
-                <a:solidFill>
-                  <a:srgbClr val="F1F5F9"/>
-                </a:solidFill>
-                <a:latin typeface="Calibri" pitchFamily="34" charset="0"/>
-                <a:ea typeface="Calibri" pitchFamily="34" charset="-122"/>
-                <a:cs typeface="Calibri" pitchFamily="34" charset="-120"/>
-              </a:rPr>
-              <a:t>The map() Function</a:t>
-            </a:r>
-            <a:endParaRPr lang="en-US" sz="2800" dirty="0"/>
-          </a:p>
-        </p:txBody>
-      </p:sp>
-      <p:sp>
-        <p:nvSpPr>
-          <p:cNvPr id="3" name="Shape 1"/>
-          <p:cNvSpPr/>
-          <p:nvPr/>
-        </p:nvSpPr>
-        <p:spPr>
-          <a:xfrm>
-            <a:off x="457200" y="886968"/>
-            <a:ext cx="8229600" cy="36576"/>
-          </a:xfrm>
-          <a:prstGeom prst="rect">
-            <a:avLst/>
-          </a:prstGeom>
-          <a:solidFill>
-            <a:srgbClr val="34D399"/>
-          </a:solidFill>
-          <a:ln w="12700">
-            <a:solidFill>
-              <a:srgbClr val="34D399"/>
-            </a:solidFill>
-            <a:prstDash val="solid"/>
-          </a:ln>
-        </p:spPr>
-      </p:sp>
-      <p:sp>
-        <p:nvSpPr>
-          <p:cNvPr id="4" name="Text 2"/>
-          <p:cNvSpPr/>
-          <p:nvPr/>
-        </p:nvSpPr>
-        <p:spPr>
-          <a:xfrm>
-            <a:off x="457200" y="1005840"/>
-            <a:ext cx="1828800" cy="256032"/>
-          </a:xfrm>
-          <a:prstGeom prst="rect">
-            <a:avLst/>
-          </a:prstGeom>
-          <a:noFill/>
-          <a:ln/>
-        </p:spPr>
-        <p:txBody>
-          <a:bodyPr wrap="square" rtlCol="0" anchor="ctr"/>
-          <a:lstStyle/>
-          <a:p>
-            <a:pPr marL="0" indent="0">
-              <a:buNone/>
-            </a:pPr>
-            <a:r>
-              <a:rPr lang="en-US" sz="1200" b="1" dirty="0">
-                <a:solidFill>
-                  <a:srgbClr val="F1F5F9"/>
-                </a:solidFill>
-                <a:latin typeface="Calibri" pitchFamily="34" charset="0"/>
-                <a:ea typeface="Calibri" pitchFamily="34" charset="-122"/>
-                <a:cs typeface="Calibri" pitchFamily="34" charset="-120"/>
-              </a:rPr>
-              <a:t>What it does:</a:t>
-            </a:r>
-            <a:endParaRPr lang="en-US" sz="1200" dirty="0"/>
-          </a:p>
-        </p:txBody>
-      </p:sp>
-      <p:sp>
-        <p:nvSpPr>
-          <p:cNvPr id="5" name="Text 3"/>
-          <p:cNvSpPr/>
-          <p:nvPr/>
-        </p:nvSpPr>
-        <p:spPr>
-          <a:xfrm>
-            <a:off x="2286000" y="987552"/>
-            <a:ext cx="3657600" cy="274320"/>
-          </a:xfrm>
-          <a:prstGeom prst="rect">
-            <a:avLst/>
-          </a:prstGeom>
-          <a:noFill/>
-          <a:ln/>
-        </p:spPr>
-        <p:txBody>
-          <a:bodyPr wrap="square" rtlCol="0" anchor="ctr"/>
-          <a:lstStyle/>
-          <a:p>
-            <a:pPr marL="0" indent="0">
-              <a:buNone/>
-            </a:pPr>
-            <a:r>
-              <a:rPr lang="en-US" sz="1300" b="1" dirty="0">
-                <a:solidFill>
-                  <a:srgbClr val="4F9CF9"/>
-                </a:solidFill>
-                <a:latin typeface="Consolas" pitchFamily="34" charset="0"/>
-                <a:ea typeface="Consolas" pitchFamily="34" charset="-122"/>
-                <a:cs typeface="Consolas" pitchFamily="34" charset="-120"/>
-              </a:rPr>
-              <a:t>map(</a:t>
-            </a:r>
-            <a:r>
-              <a:rPr lang="en-US" sz="1300" b="1" dirty="0">
-                <a:solidFill>
-                  <a:srgbClr val="F59E0B"/>
-                </a:solidFill>
-                <a:latin typeface="Consolas" pitchFamily="34" charset="0"/>
-                <a:ea typeface="Consolas" pitchFamily="34" charset="-122"/>
-                <a:cs typeface="Consolas" pitchFamily="34" charset="-120"/>
-              </a:rPr>
-              <a:t>function</a:t>
-            </a:r>
-            <a:r>
-              <a:rPr lang="en-US" sz="1300" dirty="0">
-                <a:solidFill>
-                  <a:srgbClr val="F1F5F9"/>
-                </a:solidFill>
-                <a:latin typeface="Consolas" pitchFamily="34" charset="0"/>
-                <a:ea typeface="Consolas" pitchFamily="34" charset="-122"/>
-                <a:cs typeface="Consolas" pitchFamily="34" charset="-120"/>
-              </a:rPr>
-              <a:t>, </a:t>
-            </a:r>
-            <a:r>
-              <a:rPr lang="en-US" sz="1300" b="1" dirty="0">
-                <a:solidFill>
-                  <a:srgbClr val="34D399"/>
-                </a:solidFill>
-                <a:latin typeface="Consolas" pitchFamily="34" charset="0"/>
-                <a:ea typeface="Consolas" pitchFamily="34" charset="-122"/>
-                <a:cs typeface="Consolas" pitchFamily="34" charset="-120"/>
-              </a:rPr>
-              <a:t>iterable</a:t>
-            </a:r>
-            <a:r>
-              <a:rPr lang="en-US" sz="1300" b="1" dirty="0">
-                <a:solidFill>
-                  <a:srgbClr val="4F9CF9"/>
-                </a:solidFill>
-                <a:latin typeface="Consolas" pitchFamily="34" charset="0"/>
-                <a:ea typeface="Consolas" pitchFamily="34" charset="-122"/>
-                <a:cs typeface="Consolas" pitchFamily="34" charset="-120"/>
-              </a:rPr>
-              <a:t>)</a:t>
-            </a:r>
-            <a:endParaRPr lang="en-US" sz="1300" dirty="0"/>
-          </a:p>
-        </p:txBody>
-      </p:sp>
-      <p:sp>
-        <p:nvSpPr>
-          <p:cNvPr id="6" name="Text 4"/>
-          <p:cNvSpPr/>
-          <p:nvPr/>
-        </p:nvSpPr>
-        <p:spPr>
-          <a:xfrm>
-            <a:off x="5943600" y="1005840"/>
-            <a:ext cx="2926080" cy="256032"/>
-          </a:xfrm>
-          <a:prstGeom prst="rect">
-            <a:avLst/>
-          </a:prstGeom>
-          <a:noFill/>
-          <a:ln/>
-        </p:spPr>
-        <p:txBody>
-          <a:bodyPr wrap="square" rtlCol="0" anchor="ctr"/>
-          <a:lstStyle/>
-          <a:p>
-            <a:pPr marL="0" indent="0">
-              <a:buNone/>
-            </a:pPr>
-            <a:r>
-              <a:rPr lang="en-US" sz="1100" i="1" dirty="0">
-                <a:solidFill>
-                  <a:srgbClr val="8B95A8"/>
-                </a:solidFill>
-                <a:latin typeface="Calibri" pitchFamily="34" charset="0"/>
-                <a:ea typeface="Calibri" pitchFamily="34" charset="-122"/>
-                <a:cs typeface="Calibri" pitchFamily="34" charset="-120"/>
-              </a:rPr>
-              <a:t>→  Apply function to EVERY item</a:t>
-            </a:r>
-            <a:endParaRPr lang="en-US" sz="1100" dirty="0"/>
-          </a:p>
-        </p:txBody>
-      </p:sp>
-      <p:sp>
-        <p:nvSpPr>
-          <p:cNvPr id="7" name="Shape 5"/>
-          <p:cNvSpPr/>
-          <p:nvPr/>
-        </p:nvSpPr>
-        <p:spPr>
-          <a:xfrm>
-            <a:off x="457200" y="1353312"/>
-            <a:ext cx="502920" cy="347472"/>
-          </a:xfrm>
-          <a:prstGeom prst="rect">
-            <a:avLst/>
-          </a:prstGeom>
-          <a:solidFill>
-            <a:srgbClr val="1C2B3A"/>
-          </a:solidFill>
-          <a:ln w="12700">
-            <a:solidFill>
-              <a:srgbClr val="4F9CF9"/>
-            </a:solidFill>
-            <a:prstDash val="solid"/>
-          </a:ln>
-        </p:spPr>
-      </p:sp>
-      <p:sp>
-        <p:nvSpPr>
-          <p:cNvPr id="8" name="Text 6"/>
-          <p:cNvSpPr/>
-          <p:nvPr/>
-        </p:nvSpPr>
-        <p:spPr>
-          <a:xfrm>
-            <a:off x="457200" y="1353312"/>
-            <a:ext cx="502920" cy="347472"/>
-          </a:xfrm>
-          <a:prstGeom prst="rect">
-            <a:avLst/>
-          </a:prstGeom>
-          <a:noFill/>
-          <a:ln/>
-        </p:spPr>
-        <p:txBody>
-          <a:bodyPr wrap="square" rtlCol="0" anchor="ctr"/>
-          <a:lstStyle/>
-          <a:p>
-            <a:pPr marL="0" indent="0" algn="ctr">
-              <a:buNone/>
-            </a:pPr>
-            <a:r>
-              <a:rPr lang="en-US" sz="1300" b="1" dirty="0">
-                <a:solidFill>
-                  <a:srgbClr val="4F9CF9"/>
-                </a:solidFill>
-                <a:latin typeface="Consolas" pitchFamily="34" charset="0"/>
-                <a:ea typeface="Consolas" pitchFamily="34" charset="-122"/>
-                <a:cs typeface="Consolas" pitchFamily="34" charset="-120"/>
-              </a:rPr>
-              <a:t>1</a:t>
-            </a:r>
-            <a:endParaRPr lang="en-US" sz="1300" dirty="0"/>
-          </a:p>
-        </p:txBody>
-      </p:sp>
-      <p:sp>
-        <p:nvSpPr>
-          <p:cNvPr id="9" name="Shape 7"/>
-          <p:cNvSpPr/>
-          <p:nvPr/>
-        </p:nvSpPr>
-        <p:spPr>
-          <a:xfrm>
-            <a:off x="1143000" y="1353312"/>
-            <a:ext cx="502920" cy="347472"/>
-          </a:xfrm>
-          <a:prstGeom prst="rect">
-            <a:avLst/>
-          </a:prstGeom>
-          <a:solidFill>
-            <a:srgbClr val="1C2B3A"/>
-          </a:solidFill>
-          <a:ln w="12700">
-            <a:solidFill>
-              <a:srgbClr val="4F9CF9"/>
-            </a:solidFill>
-            <a:prstDash val="solid"/>
-          </a:ln>
-        </p:spPr>
-      </p:sp>
-      <p:sp>
-        <p:nvSpPr>
-          <p:cNvPr id="10" name="Text 8"/>
-          <p:cNvSpPr/>
-          <p:nvPr/>
-        </p:nvSpPr>
-        <p:spPr>
-          <a:xfrm>
-            <a:off x="1143000" y="1353312"/>
-            <a:ext cx="502920" cy="347472"/>
-          </a:xfrm>
-          <a:prstGeom prst="rect">
-            <a:avLst/>
-          </a:prstGeom>
-          <a:noFill/>
-          <a:ln/>
-        </p:spPr>
-        <p:txBody>
-          <a:bodyPr wrap="square" rtlCol="0" anchor="ctr"/>
-          <a:lstStyle/>
-          <a:p>
-            <a:pPr marL="0" indent="0" algn="ctr">
-              <a:buNone/>
-            </a:pPr>
-            <a:r>
-              <a:rPr lang="en-US" sz="1300" b="1" dirty="0">
-                <a:solidFill>
-                  <a:srgbClr val="4F9CF9"/>
-                </a:solidFill>
-                <a:latin typeface="Consolas" pitchFamily="34" charset="0"/>
-                <a:ea typeface="Consolas" pitchFamily="34" charset="-122"/>
-                <a:cs typeface="Consolas" pitchFamily="34" charset="-120"/>
-              </a:rPr>
-              <a:t>2</a:t>
-            </a:r>
-            <a:endParaRPr lang="en-US" sz="1300" dirty="0"/>
-          </a:p>
-        </p:txBody>
-      </p:sp>
-      <p:sp>
-        <p:nvSpPr>
-          <p:cNvPr id="11" name="Shape 9"/>
-          <p:cNvSpPr/>
-          <p:nvPr/>
-        </p:nvSpPr>
-        <p:spPr>
-          <a:xfrm>
-            <a:off x="1828800" y="1353312"/>
-            <a:ext cx="502920" cy="347472"/>
-          </a:xfrm>
-          <a:prstGeom prst="rect">
-            <a:avLst/>
-          </a:prstGeom>
-          <a:solidFill>
-            <a:srgbClr val="1C2B3A"/>
-          </a:solidFill>
-          <a:ln w="12700">
-            <a:solidFill>
-              <a:srgbClr val="4F9CF9"/>
-            </a:solidFill>
-            <a:prstDash val="solid"/>
-          </a:ln>
-        </p:spPr>
-      </p:sp>
-      <p:sp>
-        <p:nvSpPr>
-          <p:cNvPr id="12" name="Text 10"/>
-          <p:cNvSpPr/>
-          <p:nvPr/>
-        </p:nvSpPr>
-        <p:spPr>
-          <a:xfrm>
-            <a:off x="1828800" y="1353312"/>
-            <a:ext cx="502920" cy="347472"/>
-          </a:xfrm>
-          <a:prstGeom prst="rect">
-            <a:avLst/>
-          </a:prstGeom>
-          <a:noFill/>
-          <a:ln/>
-        </p:spPr>
-        <p:txBody>
-          <a:bodyPr wrap="square" rtlCol="0" anchor="ctr"/>
-          <a:lstStyle/>
-          <a:p>
-            <a:pPr marL="0" indent="0" algn="ctr">
-              <a:buNone/>
-            </a:pPr>
-            <a:r>
-              <a:rPr lang="en-US" sz="1300" b="1" dirty="0">
-                <a:solidFill>
-                  <a:srgbClr val="4F9CF9"/>
-                </a:solidFill>
-                <a:latin typeface="Consolas" pitchFamily="34" charset="0"/>
-                <a:ea typeface="Consolas" pitchFamily="34" charset="-122"/>
-                <a:cs typeface="Consolas" pitchFamily="34" charset="-120"/>
-              </a:rPr>
-              <a:t>3</a:t>
-            </a:r>
-            <a:endParaRPr lang="en-US" sz="1300" dirty="0"/>
-          </a:p>
-        </p:txBody>
-      </p:sp>
-      <p:sp>
-        <p:nvSpPr>
-          <p:cNvPr id="13" name="Shape 11"/>
-          <p:cNvSpPr/>
-          <p:nvPr/>
-        </p:nvSpPr>
-        <p:spPr>
-          <a:xfrm>
-            <a:off x="2514600" y="1353312"/>
-            <a:ext cx="502920" cy="347472"/>
-          </a:xfrm>
-          <a:prstGeom prst="rect">
-            <a:avLst/>
-          </a:prstGeom>
-          <a:solidFill>
-            <a:srgbClr val="1C2B3A"/>
-          </a:solidFill>
-          <a:ln w="12700">
-            <a:solidFill>
-              <a:srgbClr val="4F9CF9"/>
-            </a:solidFill>
-            <a:prstDash val="solid"/>
-          </a:ln>
-        </p:spPr>
-      </p:sp>
-      <p:sp>
-        <p:nvSpPr>
-          <p:cNvPr id="14" name="Text 12"/>
-          <p:cNvSpPr/>
-          <p:nvPr/>
-        </p:nvSpPr>
-        <p:spPr>
-          <a:xfrm>
-            <a:off x="2514600" y="1353312"/>
-            <a:ext cx="502920" cy="347472"/>
-          </a:xfrm>
-          <a:prstGeom prst="rect">
-            <a:avLst/>
-          </a:prstGeom>
-          <a:noFill/>
-          <a:ln/>
-        </p:spPr>
-        <p:txBody>
-          <a:bodyPr wrap="square" rtlCol="0" anchor="ctr"/>
-          <a:lstStyle/>
-          <a:p>
-            <a:pPr marL="0" indent="0" algn="ctr">
-              <a:buNone/>
-            </a:pPr>
-            <a:r>
-              <a:rPr lang="en-US" sz="1300" b="1" dirty="0">
-                <a:solidFill>
-                  <a:srgbClr val="4F9CF9"/>
-                </a:solidFill>
-                <a:latin typeface="Consolas" pitchFamily="34" charset="0"/>
-                <a:ea typeface="Consolas" pitchFamily="34" charset="-122"/>
-                <a:cs typeface="Consolas" pitchFamily="34" charset="-120"/>
-              </a:rPr>
-              <a:t>4</a:t>
-            </a:r>
-            <a:endParaRPr lang="en-US" sz="1300" dirty="0"/>
-          </a:p>
-        </p:txBody>
-      </p:sp>
-      <p:sp>
-        <p:nvSpPr>
-          <p:cNvPr id="15" name="Shape 13"/>
-          <p:cNvSpPr/>
-          <p:nvPr/>
-        </p:nvSpPr>
-        <p:spPr>
-          <a:xfrm>
-            <a:off x="3200400" y="1353312"/>
-            <a:ext cx="502920" cy="347472"/>
-          </a:xfrm>
-          <a:prstGeom prst="rect">
-            <a:avLst/>
-          </a:prstGeom>
-          <a:solidFill>
-            <a:srgbClr val="1C2B3A"/>
-          </a:solidFill>
-          <a:ln w="12700">
-            <a:solidFill>
-              <a:srgbClr val="4F9CF9"/>
-            </a:solidFill>
-            <a:prstDash val="solid"/>
-          </a:ln>
-        </p:spPr>
-      </p:sp>
-      <p:sp>
-        <p:nvSpPr>
-          <p:cNvPr id="16" name="Text 14"/>
-          <p:cNvSpPr/>
-          <p:nvPr/>
-        </p:nvSpPr>
-        <p:spPr>
-          <a:xfrm>
-            <a:off x="3200400" y="1353312"/>
-            <a:ext cx="502920" cy="347472"/>
-          </a:xfrm>
-          <a:prstGeom prst="rect">
-            <a:avLst/>
-          </a:prstGeom>
-          <a:noFill/>
-          <a:ln/>
-        </p:spPr>
-        <p:txBody>
-          <a:bodyPr wrap="square" rtlCol="0" anchor="ctr"/>
-          <a:lstStyle/>
-          <a:p>
-            <a:pPr marL="0" indent="0" algn="ctr">
-              <a:buNone/>
-            </a:pPr>
-            <a:r>
-              <a:rPr lang="en-US" sz="1300" b="1" dirty="0">
-                <a:solidFill>
-                  <a:srgbClr val="4F9CF9"/>
-                </a:solidFill>
-                <a:latin typeface="Consolas" pitchFamily="34" charset="0"/>
-                <a:ea typeface="Consolas" pitchFamily="34" charset="-122"/>
-                <a:cs typeface="Consolas" pitchFamily="34" charset="-120"/>
-              </a:rPr>
-              <a:t>5</a:t>
-            </a:r>
-            <a:endParaRPr lang="en-US" sz="1300" dirty="0"/>
-          </a:p>
-        </p:txBody>
-      </p:sp>
-      <p:sp>
-        <p:nvSpPr>
-          <p:cNvPr id="17" name="Text 15"/>
-          <p:cNvSpPr/>
-          <p:nvPr/>
-        </p:nvSpPr>
-        <p:spPr>
-          <a:xfrm>
-            <a:off x="4023360" y="1371600"/>
-            <a:ext cx="457200" cy="274320"/>
-          </a:xfrm>
-          <a:prstGeom prst="rect">
-            <a:avLst/>
-          </a:prstGeom>
-          <a:noFill/>
-          <a:ln/>
-        </p:spPr>
-        <p:txBody>
-          <a:bodyPr wrap="square" rtlCol="0" anchor="ctr"/>
-          <a:lstStyle/>
-          <a:p>
-            <a:pPr marL="0" indent="0" algn="ctr">
-              <a:buNone/>
-            </a:pPr>
-            <a:r>
-              <a:rPr lang="en-US" sz="1600" dirty="0">
-                <a:solidFill>
-                  <a:srgbClr val="8B95A8"/>
-                </a:solidFill>
-                <a:latin typeface="Calibri" pitchFamily="34" charset="0"/>
-                <a:ea typeface="Calibri" pitchFamily="34" charset="-122"/>
-                <a:cs typeface="Calibri" pitchFamily="34" charset="-120"/>
-              </a:rPr>
-              <a:t>→</a:t>
-            </a:r>
-            <a:endParaRPr lang="en-US" sz="1600" dirty="0"/>
-          </a:p>
-        </p:txBody>
-      </p:sp>
-      <p:sp>
-        <p:nvSpPr>
-          <p:cNvPr id="18" name="Shape 16"/>
-          <p:cNvSpPr/>
-          <p:nvPr/>
-        </p:nvSpPr>
-        <p:spPr>
-          <a:xfrm>
-            <a:off x="4480560" y="1316736"/>
-            <a:ext cx="1188720" cy="384048"/>
-          </a:xfrm>
-          <a:prstGeom prst="rect">
-            <a:avLst/>
-          </a:prstGeom>
-          <a:solidFill>
-            <a:srgbClr val="A78BFA"/>
-          </a:solidFill>
-          <a:ln w="12700">
-            <a:solidFill>
-              <a:srgbClr val="A78BFA"/>
-            </a:solidFill>
-            <a:prstDash val="solid"/>
-          </a:ln>
-        </p:spPr>
-      </p:sp>
-      <p:sp>
-        <p:nvSpPr>
-          <p:cNvPr id="19" name="Text 17"/>
-          <p:cNvSpPr/>
-          <p:nvPr/>
-        </p:nvSpPr>
-        <p:spPr>
-          <a:xfrm>
-            <a:off x="4480560" y="1316736"/>
-            <a:ext cx="1188720" cy="384048"/>
-          </a:xfrm>
-          <a:prstGeom prst="rect">
-            <a:avLst/>
-          </a:prstGeom>
-          <a:noFill/>
-          <a:ln/>
-        </p:spPr>
-        <p:txBody>
-          <a:bodyPr wrap="square" rtlCol="0" anchor="ctr"/>
-          <a:lstStyle/>
-          <a:p>
-            <a:pPr marL="0" indent="0" algn="ctr">
-              <a:buNone/>
-            </a:pPr>
-            <a:r>
-              <a:rPr lang="en-US" sz="1200" b="1" dirty="0">
-                <a:solidFill>
-                  <a:srgbClr val="0F1117"/>
-                </a:solidFill>
-                <a:latin typeface="Consolas" pitchFamily="34" charset="0"/>
-                <a:ea typeface="Consolas" pitchFamily="34" charset="-122"/>
-                <a:cs typeface="Consolas" pitchFamily="34" charset="-120"/>
-              </a:rPr>
-              <a:t>x ** 2</a:t>
-            </a:r>
-            <a:endParaRPr lang="en-US" sz="1200" dirty="0"/>
-          </a:p>
-        </p:txBody>
-      </p:sp>
-      <p:sp>
-        <p:nvSpPr>
-          <p:cNvPr id="20" name="Text 18"/>
-          <p:cNvSpPr/>
-          <p:nvPr/>
-        </p:nvSpPr>
-        <p:spPr>
-          <a:xfrm>
-            <a:off x="5715000" y="1371600"/>
-            <a:ext cx="457200" cy="274320"/>
-          </a:xfrm>
-          <a:prstGeom prst="rect">
-            <a:avLst/>
-          </a:prstGeom>
-          <a:noFill/>
-          <a:ln/>
-        </p:spPr>
-        <p:txBody>
-          <a:bodyPr wrap="square" rtlCol="0" anchor="ctr"/>
-          <a:lstStyle/>
-          <a:p>
-            <a:pPr marL="0" indent="0" algn="ctr">
-              <a:buNone/>
-            </a:pPr>
-            <a:r>
-              <a:rPr lang="en-US" sz="1600" dirty="0">
-                <a:solidFill>
-                  <a:srgbClr val="8B95A8"/>
-                </a:solidFill>
-                <a:latin typeface="Calibri" pitchFamily="34" charset="0"/>
-                <a:ea typeface="Calibri" pitchFamily="34" charset="-122"/>
-                <a:cs typeface="Calibri" pitchFamily="34" charset="-120"/>
-              </a:rPr>
-              <a:t>→</a:t>
-            </a:r>
-            <a:endParaRPr lang="en-US" sz="1600" dirty="0"/>
-          </a:p>
-        </p:txBody>
-      </p:sp>
-      <p:sp>
-        <p:nvSpPr>
-          <p:cNvPr id="21" name="Shape 19"/>
-          <p:cNvSpPr/>
-          <p:nvPr/>
-        </p:nvSpPr>
-        <p:spPr>
-          <a:xfrm>
-            <a:off x="6217920" y="1353312"/>
-            <a:ext cx="484632" cy="347472"/>
-          </a:xfrm>
-          <a:prstGeom prst="rect">
-            <a:avLst/>
-          </a:prstGeom>
-          <a:solidFill>
-            <a:srgbClr val="1C3A2B"/>
-          </a:solidFill>
-          <a:ln w="12700">
-            <a:solidFill>
-              <a:srgbClr val="34D399"/>
-            </a:solidFill>
-            <a:prstDash val="solid"/>
-          </a:ln>
-        </p:spPr>
-      </p:sp>
-      <p:sp>
-        <p:nvSpPr>
-          <p:cNvPr id="22" name="Text 20"/>
-          <p:cNvSpPr/>
-          <p:nvPr/>
-        </p:nvSpPr>
-        <p:spPr>
-          <a:xfrm>
-            <a:off x="6217920" y="1353312"/>
-            <a:ext cx="484632" cy="347472"/>
-          </a:xfrm>
-          <a:prstGeom prst="rect">
-            <a:avLst/>
-          </a:prstGeom>
-          <a:noFill/>
-          <a:ln/>
-        </p:spPr>
-        <p:txBody>
-          <a:bodyPr wrap="square" rtlCol="0" anchor="ctr"/>
-          <a:lstStyle/>
-          <a:p>
-            <a:pPr marL="0" indent="0" algn="ctr">
-              <a:buNone/>
-            </a:pPr>
-            <a:r>
-              <a:rPr lang="en-US" sz="1200" b="1" dirty="0">
-                <a:solidFill>
-                  <a:srgbClr val="34D399"/>
-                </a:solidFill>
-                <a:latin typeface="Consolas" pitchFamily="34" charset="0"/>
-                <a:ea typeface="Consolas" pitchFamily="34" charset="-122"/>
-                <a:cs typeface="Consolas" pitchFamily="34" charset="-120"/>
-              </a:rPr>
-              <a:t>1</a:t>
-            </a:r>
-            <a:endParaRPr lang="en-US" sz="1200" dirty="0"/>
-          </a:p>
-        </p:txBody>
-      </p:sp>
-      <p:sp>
-        <p:nvSpPr>
-          <p:cNvPr id="23" name="Shape 21"/>
-          <p:cNvSpPr/>
-          <p:nvPr/>
-        </p:nvSpPr>
-        <p:spPr>
-          <a:xfrm>
-            <a:off x="6793992" y="1353312"/>
-            <a:ext cx="484632" cy="347472"/>
-          </a:xfrm>
-          <a:prstGeom prst="rect">
-            <a:avLst/>
-          </a:prstGeom>
-          <a:solidFill>
-            <a:srgbClr val="1C3A2B"/>
-          </a:solidFill>
-          <a:ln w="12700">
-            <a:solidFill>
-              <a:srgbClr val="34D399"/>
-            </a:solidFill>
-            <a:prstDash val="solid"/>
-          </a:ln>
-        </p:spPr>
-      </p:sp>
-      <p:sp>
-        <p:nvSpPr>
-          <p:cNvPr id="24" name="Text 22"/>
-          <p:cNvSpPr/>
-          <p:nvPr/>
-        </p:nvSpPr>
-        <p:spPr>
-          <a:xfrm>
-            <a:off x="6793992" y="1353312"/>
-            <a:ext cx="484632" cy="347472"/>
-          </a:xfrm>
-          <a:prstGeom prst="rect">
-            <a:avLst/>
-          </a:prstGeom>
-          <a:noFill/>
-          <a:ln/>
-        </p:spPr>
-        <p:txBody>
-          <a:bodyPr wrap="square" rtlCol="0" anchor="ctr"/>
-          <a:lstStyle/>
-          <a:p>
-            <a:pPr marL="0" indent="0" algn="ctr">
-              <a:buNone/>
-            </a:pPr>
-            <a:r>
-              <a:rPr lang="en-US" sz="1200" b="1" dirty="0">
-                <a:solidFill>
-                  <a:srgbClr val="34D399"/>
-                </a:solidFill>
-                <a:latin typeface="Consolas" pitchFamily="34" charset="0"/>
-                <a:ea typeface="Consolas" pitchFamily="34" charset="-122"/>
-                <a:cs typeface="Consolas" pitchFamily="34" charset="-120"/>
-              </a:rPr>
-              <a:t>4</a:t>
-            </a:r>
-            <a:endParaRPr lang="en-US" sz="1200" dirty="0"/>
-          </a:p>
-        </p:txBody>
-      </p:sp>
-      <p:sp>
-        <p:nvSpPr>
-          <p:cNvPr id="25" name="Shape 23"/>
-          <p:cNvSpPr/>
-          <p:nvPr/>
-        </p:nvSpPr>
-        <p:spPr>
-          <a:xfrm>
-            <a:off x="7370064" y="1353312"/>
-            <a:ext cx="484632" cy="347472"/>
-          </a:xfrm>
-          <a:prstGeom prst="rect">
-            <a:avLst/>
-          </a:prstGeom>
-          <a:solidFill>
-            <a:srgbClr val="1C3A2B"/>
-          </a:solidFill>
-          <a:ln w="12700">
-            <a:solidFill>
-              <a:srgbClr val="34D399"/>
-            </a:solidFill>
-            <a:prstDash val="solid"/>
-          </a:ln>
-        </p:spPr>
-      </p:sp>
-      <p:sp>
-        <p:nvSpPr>
-          <p:cNvPr id="26" name="Text 24"/>
-          <p:cNvSpPr/>
-          <p:nvPr/>
-        </p:nvSpPr>
-        <p:spPr>
-          <a:xfrm>
-            <a:off x="7370064" y="1353312"/>
-            <a:ext cx="484632" cy="347472"/>
-          </a:xfrm>
-          <a:prstGeom prst="rect">
-            <a:avLst/>
-          </a:prstGeom>
-          <a:noFill/>
-          <a:ln/>
-        </p:spPr>
-        <p:txBody>
-          <a:bodyPr wrap="square" rtlCol="0" anchor="ctr"/>
-          <a:lstStyle/>
-          <a:p>
-            <a:pPr marL="0" indent="0" algn="ctr">
-              <a:buNone/>
-            </a:pPr>
-            <a:r>
-              <a:rPr lang="en-US" sz="1200" b="1" dirty="0">
-                <a:solidFill>
-                  <a:srgbClr val="34D399"/>
-                </a:solidFill>
-                <a:latin typeface="Consolas" pitchFamily="34" charset="0"/>
-                <a:ea typeface="Consolas" pitchFamily="34" charset="-122"/>
-                <a:cs typeface="Consolas" pitchFamily="34" charset="-120"/>
-              </a:rPr>
-              <a:t>9</a:t>
-            </a:r>
-            <a:endParaRPr lang="en-US" sz="1200" dirty="0"/>
-          </a:p>
-        </p:txBody>
-      </p:sp>
-      <p:sp>
-        <p:nvSpPr>
-          <p:cNvPr id="27" name="Shape 25"/>
-          <p:cNvSpPr/>
-          <p:nvPr/>
-        </p:nvSpPr>
-        <p:spPr>
-          <a:xfrm>
-            <a:off x="7946136" y="1353312"/>
-            <a:ext cx="484632" cy="347472"/>
-          </a:xfrm>
-          <a:prstGeom prst="rect">
-            <a:avLst/>
-          </a:prstGeom>
-          <a:solidFill>
-            <a:srgbClr val="1C3A2B"/>
-          </a:solidFill>
-          <a:ln w="12700">
-            <a:solidFill>
-              <a:srgbClr val="34D399"/>
-            </a:solidFill>
-            <a:prstDash val="solid"/>
-          </a:ln>
-        </p:spPr>
-      </p:sp>
-      <p:sp>
-        <p:nvSpPr>
-          <p:cNvPr id="28" name="Text 26"/>
-          <p:cNvSpPr/>
-          <p:nvPr/>
-        </p:nvSpPr>
-        <p:spPr>
-          <a:xfrm>
-            <a:off x="7946136" y="1353312"/>
-            <a:ext cx="484632" cy="347472"/>
-          </a:xfrm>
-          <a:prstGeom prst="rect">
-            <a:avLst/>
-          </a:prstGeom>
-          <a:noFill/>
-          <a:ln/>
-        </p:spPr>
-        <p:txBody>
-          <a:bodyPr wrap="square" rtlCol="0" anchor="ctr"/>
-          <a:lstStyle/>
-          <a:p>
-            <a:pPr marL="0" indent="0" algn="ctr">
-              <a:buNone/>
-            </a:pPr>
-            <a:r>
-              <a:rPr lang="en-US" sz="1200" b="1" dirty="0">
-                <a:solidFill>
-                  <a:srgbClr val="34D399"/>
-                </a:solidFill>
-                <a:latin typeface="Consolas" pitchFamily="34" charset="0"/>
-                <a:ea typeface="Consolas" pitchFamily="34" charset="-122"/>
-                <a:cs typeface="Consolas" pitchFamily="34" charset="-120"/>
-              </a:rPr>
-              <a:t>16</a:t>
-            </a:r>
-            <a:endParaRPr lang="en-US" sz="1200" dirty="0"/>
-          </a:p>
-        </p:txBody>
-      </p:sp>
-      <p:sp>
-        <p:nvSpPr>
-          <p:cNvPr id="29" name="Shape 27"/>
-          <p:cNvSpPr/>
-          <p:nvPr/>
-        </p:nvSpPr>
-        <p:spPr>
-          <a:xfrm>
-            <a:off x="8522208" y="1353312"/>
-            <a:ext cx="484632" cy="347472"/>
-          </a:xfrm>
-          <a:prstGeom prst="rect">
-            <a:avLst/>
-          </a:prstGeom>
-          <a:solidFill>
-            <a:srgbClr val="1C3A2B"/>
-          </a:solidFill>
-          <a:ln w="12700">
-            <a:solidFill>
-              <a:srgbClr val="34D399"/>
-            </a:solidFill>
-            <a:prstDash val="solid"/>
-          </a:ln>
-        </p:spPr>
-      </p:sp>
-      <p:sp>
-        <p:nvSpPr>
-          <p:cNvPr id="30" name="Text 28"/>
-          <p:cNvSpPr/>
-          <p:nvPr/>
-        </p:nvSpPr>
-        <p:spPr>
-          <a:xfrm>
-            <a:off x="8522208" y="1353312"/>
-            <a:ext cx="484632" cy="347472"/>
-          </a:xfrm>
-          <a:prstGeom prst="rect">
-            <a:avLst/>
-          </a:prstGeom>
-          <a:noFill/>
-          <a:ln/>
-        </p:spPr>
-        <p:txBody>
-          <a:bodyPr wrap="square" rtlCol="0" anchor="ctr"/>
-          <a:lstStyle/>
-          <a:p>
-            <a:pPr marL="0" indent="0" algn="ctr">
-              <a:buNone/>
-            </a:pPr>
-            <a:r>
-              <a:rPr lang="en-US" sz="1200" b="1" dirty="0">
-                <a:solidFill>
-                  <a:srgbClr val="34D399"/>
-                </a:solidFill>
-                <a:latin typeface="Consolas" pitchFamily="34" charset="0"/>
-                <a:ea typeface="Consolas" pitchFamily="34" charset="-122"/>
-                <a:cs typeface="Consolas" pitchFamily="34" charset="-120"/>
-              </a:rPr>
-              <a:t>25</a:t>
-            </a:r>
-            <a:endParaRPr lang="en-US" sz="1200" dirty="0"/>
-          </a:p>
-        </p:txBody>
-      </p:sp>
-      <p:sp>
-        <p:nvSpPr>
-          <p:cNvPr id="31" name="Text 29"/>
-          <p:cNvSpPr/>
-          <p:nvPr/>
-        </p:nvSpPr>
-        <p:spPr>
-          <a:xfrm>
-            <a:off x="457200" y="1828800"/>
-            <a:ext cx="2651760" cy="246888"/>
-          </a:xfrm>
-          <a:prstGeom prst="rect">
-            <a:avLst/>
-          </a:prstGeom>
-          <a:noFill/>
-          <a:ln/>
-        </p:spPr>
-        <p:txBody>
-          <a:bodyPr wrap="square" rtlCol="0" anchor="ctr"/>
-          <a:lstStyle/>
-          <a:p>
-            <a:pPr marL="0" indent="0">
-              <a:buNone/>
-            </a:pPr>
-            <a:r>
-              <a:rPr lang="en-US" sz="1150" b="1" dirty="0">
-                <a:solidFill>
-                  <a:srgbClr val="4F9CF9"/>
-                </a:solidFill>
-                <a:latin typeface="Calibri" pitchFamily="34" charset="0"/>
-                <a:ea typeface="Calibri" pitchFamily="34" charset="-122"/>
-                <a:cs typeface="Calibri" pitchFamily="34" charset="-120"/>
-              </a:rPr>
-              <a:t>① Named function</a:t>
-            </a:r>
-            <a:endParaRPr lang="en-US" sz="1150" dirty="0"/>
-          </a:p>
-        </p:txBody>
-      </p:sp>
-      <p:sp>
-        <p:nvSpPr>
-          <p:cNvPr id="32" name="Shape 30"/>
-          <p:cNvSpPr/>
-          <p:nvPr/>
-        </p:nvSpPr>
-        <p:spPr>
-          <a:xfrm>
-            <a:off x="457200" y="2103120"/>
-            <a:ext cx="2651760" cy="2103120"/>
-          </a:xfrm>
-          <a:prstGeom prst="rect">
-            <a:avLst/>
-          </a:prstGeom>
-          <a:solidFill>
-            <a:srgbClr val="161B22"/>
-          </a:solidFill>
-          <a:ln w="12700">
-            <a:solidFill>
-              <a:srgbClr val="4F9CF9"/>
-            </a:solidFill>
-            <a:prstDash val="solid"/>
-          </a:ln>
-        </p:spPr>
-      </p:sp>
-      <p:sp>
-        <p:nvSpPr>
-          <p:cNvPr id="33" name="Text 31"/>
-          <p:cNvSpPr/>
-          <p:nvPr/>
-        </p:nvSpPr>
-        <p:spPr>
-          <a:xfrm>
-            <a:off x="594360" y="2212848"/>
-            <a:ext cx="2377440" cy="1901952"/>
-          </a:xfrm>
-          <a:prstGeom prst="rect">
-            <a:avLst/>
-          </a:prstGeom>
-          <a:noFill/>
-          <a:ln/>
-        </p:spPr>
-        <p:txBody>
-          <a:bodyPr wrap="square" rtlCol="0" anchor="ctr"/>
-          <a:lstStyle/>
-          <a:p>
-            <a:pPr marL="0" indent="0">
-              <a:buNone/>
-            </a:pPr>
-            <a:r>
-              <a:rPr lang="en-US" sz="1150" dirty="0">
-                <a:solidFill>
-                  <a:srgbClr val="4F9CF9"/>
-                </a:solidFill>
-                <a:latin typeface="Consolas" pitchFamily="34" charset="0"/>
-                <a:ea typeface="Consolas" pitchFamily="34" charset="-122"/>
-                <a:cs typeface="Consolas" pitchFamily="34" charset="-120"/>
-              </a:rPr>
-              <a:t>def square(x):</a:t>
-            </a:r>
-            <a:endParaRPr lang="en-US" sz="1150" dirty="0"/>
-          </a:p>
-          <a:p>
-            <a:pPr marL="0" indent="0">
-              <a:buNone/>
-            </a:pPr>
-            <a:r>
-              <a:rPr lang="en-US" sz="1150" dirty="0">
-                <a:solidFill>
-                  <a:srgbClr val="4F9CF9"/>
-                </a:solidFill>
-                <a:latin typeface="Consolas" pitchFamily="34" charset="0"/>
-                <a:ea typeface="Consolas" pitchFamily="34" charset="-122"/>
-                <a:cs typeface="Consolas" pitchFamily="34" charset="-120"/>
-              </a:rPr>
-              <a:t>    return x ** 2</a:t>
-            </a:r>
-            <a:endParaRPr lang="en-US" sz="1150" dirty="0"/>
-          </a:p>
-          <a:p>
-            <a:pPr marL="0" indent="0">
-              <a:buNone/>
-            </a:pPr>
-            <a:endParaRPr lang="en-US" sz="1150" dirty="0"/>
-          </a:p>
-          <a:p>
-            <a:pPr marL="0" indent="0">
-              <a:buNone/>
-            </a:pPr>
-            <a:r>
-              <a:rPr lang="en-US" sz="1150" dirty="0">
-                <a:solidFill>
-                  <a:srgbClr val="79C0FF"/>
-                </a:solidFill>
-                <a:latin typeface="Consolas" pitchFamily="34" charset="0"/>
-                <a:ea typeface="Consolas" pitchFamily="34" charset="-122"/>
-                <a:cs typeface="Consolas" pitchFamily="34" charset="-120"/>
-              </a:rPr>
-              <a:t>nums = [1, 2, 3, 4, 5]</a:t>
-            </a:r>
-            <a:endParaRPr lang="en-US" sz="1150" dirty="0"/>
-          </a:p>
-          <a:p>
-            <a:pPr marL="0" indent="0">
-              <a:buNone/>
-            </a:pPr>
-            <a:r>
-              <a:rPr lang="en-US" sz="1150" dirty="0">
-                <a:solidFill>
-                  <a:srgbClr val="79C0FF"/>
-                </a:solidFill>
-                <a:latin typeface="Consolas" pitchFamily="34" charset="0"/>
-                <a:ea typeface="Consolas" pitchFamily="34" charset="-122"/>
-                <a:cs typeface="Consolas" pitchFamily="34" charset="-120"/>
-              </a:rPr>
-              <a:t>result = list(</a:t>
-            </a:r>
-            <a:endParaRPr lang="en-US" sz="1150" dirty="0"/>
-          </a:p>
-          <a:p>
-            <a:pPr marL="0" indent="0">
-              <a:buNone/>
-            </a:pPr>
-            <a:r>
-              <a:rPr lang="en-US" sz="1150" dirty="0">
-                <a:solidFill>
-                  <a:srgbClr val="4F9CF9"/>
-                </a:solidFill>
-                <a:latin typeface="Consolas" pitchFamily="34" charset="0"/>
-                <a:ea typeface="Consolas" pitchFamily="34" charset="-122"/>
-                <a:cs typeface="Consolas" pitchFamily="34" charset="-120"/>
-              </a:rPr>
-              <a:t>    map(square, nums)</a:t>
-            </a:r>
-            <a:endParaRPr lang="en-US" sz="1150" dirty="0"/>
-          </a:p>
-          <a:p>
-            <a:pPr marL="0" indent="0">
-              <a:buNone/>
-            </a:pPr>
-            <a:r>
-              <a:rPr lang="en-US" sz="1150" dirty="0">
-                <a:solidFill>
-                  <a:srgbClr val="79C0FF"/>
-                </a:solidFill>
-                <a:latin typeface="Consolas" pitchFamily="34" charset="0"/>
-                <a:ea typeface="Consolas" pitchFamily="34" charset="-122"/>
-                <a:cs typeface="Consolas" pitchFamily="34" charset="-120"/>
-              </a:rPr>
-              <a:t>)</a:t>
-            </a:r>
-            <a:endParaRPr lang="en-US" sz="1150" dirty="0"/>
-          </a:p>
-          <a:p>
-            <a:pPr marL="0" indent="0">
-              <a:buNone/>
-            </a:pPr>
-            <a:r>
-              <a:rPr lang="en-US" sz="1150" dirty="0">
-                <a:solidFill>
-                  <a:srgbClr val="6A9955"/>
-                </a:solidFill>
-                <a:latin typeface="Consolas" pitchFamily="34" charset="0"/>
-                <a:ea typeface="Consolas" pitchFamily="34" charset="-122"/>
-                <a:cs typeface="Consolas" pitchFamily="34" charset="-120"/>
-              </a:rPr>
-              <a:t># → [1, 4, 9, 16, 25]</a:t>
-            </a:r>
-            <a:endParaRPr lang="en-US" sz="1150" dirty="0"/>
-          </a:p>
-        </p:txBody>
-      </p:sp>
-      <p:sp>
-        <p:nvSpPr>
-          <p:cNvPr id="34" name="Text 32"/>
-          <p:cNvSpPr/>
-          <p:nvPr/>
-        </p:nvSpPr>
-        <p:spPr>
-          <a:xfrm>
-            <a:off x="3246120" y="1828800"/>
-            <a:ext cx="2651760" cy="246888"/>
-          </a:xfrm>
-          <a:prstGeom prst="rect">
-            <a:avLst/>
-          </a:prstGeom>
-          <a:noFill/>
-          <a:ln/>
-        </p:spPr>
-        <p:txBody>
-          <a:bodyPr wrap="square" rtlCol="0" anchor="ctr"/>
-          <a:lstStyle/>
-          <a:p>
-            <a:pPr marL="0" indent="0">
-              <a:buNone/>
-            </a:pPr>
-            <a:r>
-              <a:rPr lang="en-US" sz="1150" b="1" dirty="0">
-                <a:solidFill>
-                  <a:srgbClr val="A78BFA"/>
-                </a:solidFill>
-                <a:latin typeface="Calibri" pitchFamily="34" charset="0"/>
-                <a:ea typeface="Calibri" pitchFamily="34" charset="-122"/>
-                <a:cs typeface="Calibri" pitchFamily="34" charset="-120"/>
-              </a:rPr>
-              <a:t>② With lambda</a:t>
-            </a:r>
-            <a:endParaRPr lang="en-US" sz="1150" dirty="0"/>
-          </a:p>
-        </p:txBody>
-      </p:sp>
-      <p:sp>
-        <p:nvSpPr>
-          <p:cNvPr id="35" name="Shape 33"/>
-          <p:cNvSpPr/>
-          <p:nvPr/>
-        </p:nvSpPr>
-        <p:spPr>
-          <a:xfrm>
-            <a:off x="3246120" y="2103120"/>
-            <a:ext cx="2651760" cy="2103120"/>
-          </a:xfrm>
-          <a:prstGeom prst="rect">
-            <a:avLst/>
-          </a:prstGeom>
-          <a:solidFill>
-            <a:srgbClr val="161B22"/>
-          </a:solidFill>
-          <a:ln w="12700">
-            <a:solidFill>
-              <a:srgbClr val="4F9CF9"/>
-            </a:solidFill>
-            <a:prstDash val="solid"/>
-          </a:ln>
-        </p:spPr>
-      </p:sp>
-      <p:sp>
-        <p:nvSpPr>
-          <p:cNvPr id="36" name="Text 34"/>
-          <p:cNvSpPr/>
-          <p:nvPr/>
-        </p:nvSpPr>
-        <p:spPr>
-          <a:xfrm>
-            <a:off x="3383280" y="2212848"/>
-            <a:ext cx="2377440" cy="1901952"/>
-          </a:xfrm>
-          <a:prstGeom prst="rect">
-            <a:avLst/>
-          </a:prstGeom>
-          <a:noFill/>
-          <a:ln/>
-        </p:spPr>
-        <p:txBody>
-          <a:bodyPr wrap="square" rtlCol="0" anchor="ctr"/>
-          <a:lstStyle/>
-          <a:p>
-            <a:pPr marL="0" indent="0">
-              <a:buNone/>
-            </a:pPr>
-            <a:r>
-              <a:rPr lang="en-US" sz="1150" dirty="0">
-                <a:solidFill>
-                  <a:srgbClr val="6A9955"/>
-                </a:solidFill>
-                <a:latin typeface="Consolas" pitchFamily="34" charset="0"/>
-                <a:ea typeface="Consolas" pitchFamily="34" charset="-122"/>
-                <a:cs typeface="Consolas" pitchFamily="34" charset="-120"/>
-              </a:rPr>
-              <a:t># Numbers</a:t>
-            </a:r>
-            <a:endParaRPr lang="en-US" sz="1150" dirty="0"/>
-          </a:p>
-          <a:p>
-            <a:pPr marL="0" indent="0">
-              <a:buNone/>
-            </a:pPr>
-            <a:r>
-              <a:rPr lang="en-US" sz="1150" dirty="0">
-                <a:solidFill>
-                  <a:srgbClr val="4F9CF9"/>
-                </a:solidFill>
-                <a:latin typeface="Consolas" pitchFamily="34" charset="0"/>
-                <a:ea typeface="Consolas" pitchFamily="34" charset="-122"/>
-                <a:cs typeface="Consolas" pitchFamily="34" charset="-120"/>
-              </a:rPr>
-              <a:t>list(map(lambda x: x*2, nums))</a:t>
-            </a:r>
-            <a:endParaRPr lang="en-US" sz="1150" dirty="0"/>
-          </a:p>
-          <a:p>
-            <a:pPr marL="0" indent="0">
-              <a:buNone/>
-            </a:pPr>
-            <a:r>
-              <a:rPr lang="en-US" sz="1150" dirty="0">
-                <a:solidFill>
-                  <a:srgbClr val="6A9955"/>
-                </a:solidFill>
-                <a:latin typeface="Consolas" pitchFamily="34" charset="0"/>
-                <a:ea typeface="Consolas" pitchFamily="34" charset="-122"/>
-                <a:cs typeface="Consolas" pitchFamily="34" charset="-120"/>
-              </a:rPr>
-              <a:t># → [2, 4, 6, 8, 10]</a:t>
-            </a:r>
-            <a:endParaRPr lang="en-US" sz="1150" dirty="0"/>
-          </a:p>
-          <a:p>
-            <a:pPr marL="0" indent="0">
-              <a:buNone/>
-            </a:pPr>
-            <a:endParaRPr lang="en-US" sz="1150" dirty="0"/>
-          </a:p>
-          <a:p>
-            <a:pPr marL="0" indent="0">
-              <a:buNone/>
-            </a:pPr>
-            <a:r>
-              <a:rPr lang="en-US" sz="1150" dirty="0">
-                <a:solidFill>
-                  <a:srgbClr val="6A9955"/>
-                </a:solidFill>
-                <a:latin typeface="Consolas" pitchFamily="34" charset="0"/>
-                <a:ea typeface="Consolas" pitchFamily="34" charset="-122"/>
-                <a:cs typeface="Consolas" pitchFamily="34" charset="-120"/>
-              </a:rPr>
-              <a:t># Strings</a:t>
-            </a:r>
-            <a:endParaRPr lang="en-US" sz="1150" dirty="0"/>
-          </a:p>
-          <a:p>
-            <a:pPr marL="0" indent="0">
-              <a:buNone/>
-            </a:pPr>
-            <a:r>
-              <a:rPr lang="en-US" sz="1150" dirty="0">
-                <a:solidFill>
-                  <a:srgbClr val="79C0FF"/>
-                </a:solidFill>
-                <a:latin typeface="Consolas" pitchFamily="34" charset="0"/>
-                <a:ea typeface="Consolas" pitchFamily="34" charset="-122"/>
-                <a:cs typeface="Consolas" pitchFamily="34" charset="-120"/>
-              </a:rPr>
-              <a:t>words = ['hi', 'world']</a:t>
-            </a:r>
-            <a:endParaRPr lang="en-US" sz="1150" dirty="0"/>
-          </a:p>
-          <a:p>
-            <a:pPr marL="0" indent="0">
-              <a:buNone/>
-            </a:pPr>
-            <a:r>
-              <a:rPr lang="en-US" sz="1150" dirty="0">
-                <a:solidFill>
-                  <a:srgbClr val="4F9CF9"/>
-                </a:solidFill>
-                <a:latin typeface="Consolas" pitchFamily="34" charset="0"/>
-                <a:ea typeface="Consolas" pitchFamily="34" charset="-122"/>
-                <a:cs typeface="Consolas" pitchFamily="34" charset="-120"/>
-              </a:rPr>
-              <a:t>list(map(lambda w: w.upper(),</a:t>
-            </a:r>
-            <a:endParaRPr lang="en-US" sz="1150" dirty="0"/>
-          </a:p>
-          <a:p>
-            <a:pPr marL="0" indent="0">
-              <a:buNone/>
-            </a:pPr>
-            <a:r>
-              <a:rPr lang="en-US" sz="1150" dirty="0">
-                <a:solidFill>
-                  <a:srgbClr val="79C0FF"/>
-                </a:solidFill>
-                <a:latin typeface="Consolas" pitchFamily="34" charset="0"/>
-                <a:ea typeface="Consolas" pitchFamily="34" charset="-122"/>
-                <a:cs typeface="Consolas" pitchFamily="34" charset="-120"/>
-              </a:rPr>
-              <a:t>         words))</a:t>
-            </a:r>
-            <a:endParaRPr lang="en-US" sz="1150" dirty="0"/>
-          </a:p>
-          <a:p>
-            <a:pPr marL="0" indent="0">
-              <a:buNone/>
-            </a:pPr>
-            <a:r>
-              <a:rPr lang="en-US" sz="1150" dirty="0">
-                <a:solidFill>
-                  <a:srgbClr val="6A9955"/>
-                </a:solidFill>
-                <a:latin typeface="Consolas" pitchFamily="34" charset="0"/>
-                <a:ea typeface="Consolas" pitchFamily="34" charset="-122"/>
-                <a:cs typeface="Consolas" pitchFamily="34" charset="-120"/>
-              </a:rPr>
-              <a:t># → ['HI', 'WORLD']</a:t>
-            </a:r>
-            <a:endParaRPr lang="en-US" sz="1150" dirty="0"/>
-          </a:p>
-        </p:txBody>
-      </p:sp>
-      <p:sp>
-        <p:nvSpPr>
-          <p:cNvPr id="37" name="Text 35"/>
-          <p:cNvSpPr/>
-          <p:nvPr/>
-        </p:nvSpPr>
-        <p:spPr>
-          <a:xfrm>
-            <a:off x="6035040" y="1828800"/>
-            <a:ext cx="2743200" cy="246888"/>
-          </a:xfrm>
-          <a:prstGeom prst="rect">
-            <a:avLst/>
-          </a:prstGeom>
-          <a:noFill/>
-          <a:ln/>
-        </p:spPr>
-        <p:txBody>
-          <a:bodyPr wrap="square" rtlCol="0" anchor="ctr"/>
-          <a:lstStyle/>
-          <a:p>
-            <a:pPr marL="0" indent="0">
-              <a:buNone/>
-            </a:pPr>
-            <a:r>
-              <a:rPr lang="en-US" sz="1150" b="1" dirty="0">
-                <a:solidFill>
-                  <a:srgbClr val="34D399"/>
-                </a:solidFill>
-                <a:latin typeface="Calibri" pitchFamily="34" charset="0"/>
-                <a:ea typeface="Calibri" pitchFamily="34" charset="-122"/>
-                <a:cs typeface="Calibri" pitchFamily="34" charset="-120"/>
-              </a:rPr>
-              <a:t>③ Two lists + chaining</a:t>
-            </a:r>
-            <a:endParaRPr lang="en-US" sz="1150" dirty="0"/>
-          </a:p>
-        </p:txBody>
-      </p:sp>
-      <p:sp>
-        <p:nvSpPr>
-          <p:cNvPr id="38" name="Shape 36"/>
-          <p:cNvSpPr/>
-          <p:nvPr/>
-        </p:nvSpPr>
-        <p:spPr>
-          <a:xfrm>
-            <a:off x="6035040" y="2103120"/>
-            <a:ext cx="2743200" cy="2176272"/>
-          </a:xfrm>
-          <a:prstGeom prst="rect">
-            <a:avLst/>
-          </a:prstGeom>
-          <a:solidFill>
-            <a:srgbClr val="161B22"/>
-          </a:solidFill>
-          <a:ln w="12700">
-            <a:solidFill>
-              <a:srgbClr val="4F9CF9"/>
-            </a:solidFill>
-            <a:prstDash val="solid"/>
-          </a:ln>
-        </p:spPr>
-      </p:sp>
-      <p:sp>
-        <p:nvSpPr>
-          <p:cNvPr id="39" name="Text 37"/>
-          <p:cNvSpPr/>
-          <p:nvPr/>
-        </p:nvSpPr>
-        <p:spPr>
-          <a:xfrm>
-            <a:off x="6172200" y="2212848"/>
-            <a:ext cx="2468880" cy="1975104"/>
-          </a:xfrm>
-          <a:prstGeom prst="rect">
-            <a:avLst/>
-          </a:prstGeom>
-          <a:noFill/>
-          <a:ln/>
-        </p:spPr>
-        <p:txBody>
-          <a:bodyPr wrap="square" rtlCol="0" anchor="ctr"/>
-          <a:lstStyle/>
-          <a:p>
-            <a:pPr marL="0" indent="0">
-              <a:buNone/>
-            </a:pPr>
-            <a:r>
-              <a:rPr lang="en-US" sz="1150" dirty="0">
-                <a:solidFill>
-                  <a:srgbClr val="79C0FF"/>
-                </a:solidFill>
-                <a:latin typeface="Consolas" pitchFamily="34" charset="0"/>
-                <a:ea typeface="Consolas" pitchFamily="34" charset="-122"/>
-                <a:cs typeface="Consolas" pitchFamily="34" charset="-120"/>
-              </a:rPr>
-              <a:t>a=[1,2,3]; b=[10,20,30]</a:t>
-            </a:r>
-            <a:endParaRPr lang="en-US" sz="1150" dirty="0"/>
-          </a:p>
-          <a:p>
-            <a:pPr marL="0" indent="0">
-              <a:buNone/>
-            </a:pPr>
-            <a:r>
-              <a:rPr lang="en-US" sz="1150" dirty="0">
-                <a:solidFill>
-                  <a:srgbClr val="4F9CF9"/>
-                </a:solidFill>
-                <a:latin typeface="Consolas" pitchFamily="34" charset="0"/>
-                <a:ea typeface="Consolas" pitchFamily="34" charset="-122"/>
-                <a:cs typeface="Consolas" pitchFamily="34" charset="-120"/>
-              </a:rPr>
-              <a:t>list(map(lambda x,y:x+y,a,b))</a:t>
-            </a:r>
-            <a:endParaRPr lang="en-US" sz="1150" dirty="0"/>
-          </a:p>
-          <a:p>
-            <a:pPr marL="0" indent="0">
-              <a:buNone/>
-            </a:pPr>
-            <a:r>
-              <a:rPr lang="en-US" sz="1150" dirty="0">
-                <a:solidFill>
-                  <a:srgbClr val="6A9955"/>
-                </a:solidFill>
-                <a:latin typeface="Consolas" pitchFamily="34" charset="0"/>
-                <a:ea typeface="Consolas" pitchFamily="34" charset="-122"/>
-                <a:cs typeface="Consolas" pitchFamily="34" charset="-120"/>
-              </a:rPr>
-              <a:t># → [11, 22, 33]</a:t>
-            </a:r>
-            <a:endParaRPr lang="en-US" sz="1150" dirty="0"/>
-          </a:p>
-          <a:p>
-            <a:pPr marL="0" indent="0">
-              <a:buNone/>
-            </a:pPr>
-            <a:endParaRPr lang="en-US" sz="1150" dirty="0"/>
-          </a:p>
-          <a:p>
-            <a:pPr marL="0" indent="0">
-              <a:buNone/>
-            </a:pPr>
-            <a:r>
-              <a:rPr lang="en-US" sz="1150" dirty="0">
-                <a:solidFill>
-                  <a:srgbClr val="6A9955"/>
-                </a:solidFill>
-                <a:latin typeface="Consolas" pitchFamily="34" charset="0"/>
-                <a:ea typeface="Consolas" pitchFamily="34" charset="-122"/>
-                <a:cs typeface="Consolas" pitchFamily="34" charset="-120"/>
-              </a:rPr>
-              <a:t># filter → map pipeline</a:t>
-            </a:r>
-            <a:endParaRPr lang="en-US" sz="1150" dirty="0"/>
-          </a:p>
-          <a:p>
-            <a:pPr marL="0" indent="0">
-              <a:buNone/>
-            </a:pPr>
-            <a:r>
-              <a:rPr lang="en-US" sz="1150" dirty="0">
-                <a:solidFill>
-                  <a:srgbClr val="79C0FF"/>
-                </a:solidFill>
-                <a:latin typeface="Consolas" pitchFamily="34" charset="0"/>
-                <a:ea typeface="Consolas" pitchFamily="34" charset="-122"/>
-                <a:cs typeface="Consolas" pitchFamily="34" charset="-120"/>
-              </a:rPr>
-              <a:t>data=[1,-2,3,-4,5]</a:t>
-            </a:r>
-            <a:endParaRPr lang="en-US" sz="1150" dirty="0"/>
-          </a:p>
-          <a:p>
-            <a:pPr marL="0" indent="0">
-              <a:buNone/>
-            </a:pPr>
-            <a:r>
-              <a:rPr lang="en-US" sz="1150" dirty="0">
-                <a:solidFill>
-                  <a:srgbClr val="4F9CF9"/>
-                </a:solidFill>
-                <a:latin typeface="Consolas" pitchFamily="34" charset="0"/>
-                <a:ea typeface="Consolas" pitchFamily="34" charset="-122"/>
-                <a:cs typeface="Consolas" pitchFamily="34" charset="-120"/>
-              </a:rPr>
-              <a:t>pos=filter(lambda x:x&gt;0,data)</a:t>
-            </a:r>
-            <a:endParaRPr lang="en-US" sz="1150" dirty="0"/>
-          </a:p>
-          <a:p>
-            <a:pPr marL="0" indent="0">
-              <a:buNone/>
-            </a:pPr>
-            <a:r>
-              <a:rPr lang="en-US" sz="1150" dirty="0">
-                <a:solidFill>
-                  <a:srgbClr val="4F9CF9"/>
-                </a:solidFill>
-                <a:latin typeface="Consolas" pitchFamily="34" charset="0"/>
-                <a:ea typeface="Consolas" pitchFamily="34" charset="-122"/>
-                <a:cs typeface="Consolas" pitchFamily="34" charset="-120"/>
-              </a:rPr>
-              <a:t>list(map(lambda x:x**2,pos))</a:t>
-            </a:r>
-            <a:endParaRPr lang="en-US" sz="1150" dirty="0"/>
-          </a:p>
-          <a:p>
-            <a:pPr marL="0" indent="0">
-              <a:buNone/>
-            </a:pPr>
-            <a:r>
-              <a:rPr lang="en-US" sz="1150" dirty="0">
-                <a:solidFill>
-                  <a:srgbClr val="6A9955"/>
-                </a:solidFill>
-                <a:latin typeface="Consolas" pitchFamily="34" charset="0"/>
-                <a:ea typeface="Consolas" pitchFamily="34" charset="-122"/>
-                <a:cs typeface="Consolas" pitchFamily="34" charset="-120"/>
-              </a:rPr>
-              <a:t># → [1, 9, 25]</a:t>
-            </a:r>
-            <a:endParaRPr lang="en-US" sz="1150" dirty="0"/>
-          </a:p>
-        </p:txBody>
-      </p:sp>
-      <p:sp>
-        <p:nvSpPr>
-          <p:cNvPr id="40" name="Shape 38"/>
-          <p:cNvSpPr/>
-          <p:nvPr/>
-        </p:nvSpPr>
-        <p:spPr>
-          <a:xfrm>
-            <a:off x="457200" y="4315968"/>
-            <a:ext cx="3931920" cy="640080"/>
-          </a:xfrm>
-          <a:prstGeom prst="rect">
-            <a:avLst/>
-          </a:prstGeom>
-          <a:solidFill>
-            <a:srgbClr val="2B1C1C"/>
-          </a:solidFill>
-          <a:ln w="12700">
-            <a:solidFill>
-              <a:srgbClr val="F59E0B"/>
-            </a:solidFill>
-            <a:prstDash val="solid"/>
-          </a:ln>
-        </p:spPr>
-      </p:sp>
-      <p:sp>
-        <p:nvSpPr>
-          <p:cNvPr id="41" name="Text 39"/>
-          <p:cNvSpPr/>
-          <p:nvPr/>
-        </p:nvSpPr>
-        <p:spPr>
-          <a:xfrm>
-            <a:off x="594360" y="4343400"/>
-            <a:ext cx="3657600" cy="228600"/>
-          </a:xfrm>
-          <a:prstGeom prst="rect">
-            <a:avLst/>
-          </a:prstGeom>
-          <a:noFill/>
-          <a:ln/>
-        </p:spPr>
-        <p:txBody>
-          <a:bodyPr wrap="square" rtlCol="0" anchor="ctr"/>
-          <a:lstStyle/>
-          <a:p>
-            <a:pPr marL="0" indent="0">
-              <a:buNone/>
-            </a:pPr>
-            <a:r>
-              <a:rPr lang="en-US" sz="1100" b="1" dirty="0">
-                <a:solidFill>
-                  <a:srgbClr val="F59E0B"/>
-                </a:solidFill>
-                <a:latin typeface="Calibri" pitchFamily="34" charset="0"/>
-                <a:ea typeface="Calibri" pitchFamily="34" charset="-122"/>
-                <a:cs typeface="Calibri" pitchFamily="34" charset="-120"/>
-              </a:rPr>
-              <a:t>⚠️  Gotcha</a:t>
-            </a:r>
-            <a:endParaRPr lang="en-US" sz="1100" dirty="0"/>
-          </a:p>
-        </p:txBody>
-      </p:sp>
-      <p:sp>
-        <p:nvSpPr>
-          <p:cNvPr id="42" name="Text 40"/>
-          <p:cNvSpPr/>
-          <p:nvPr/>
-        </p:nvSpPr>
-        <p:spPr>
-          <a:xfrm>
-            <a:off x="594360" y="4562856"/>
-            <a:ext cx="3657600" cy="347472"/>
-          </a:xfrm>
-          <a:prstGeom prst="rect">
-            <a:avLst/>
-          </a:prstGeom>
-          <a:noFill/>
-          <a:ln/>
-        </p:spPr>
-        <p:txBody>
-          <a:bodyPr wrap="square" rtlCol="0" anchor="ctr"/>
-          <a:lstStyle/>
-          <a:p>
-            <a:pPr marL="0" indent="0">
-              <a:buNone/>
-            </a:pPr>
-            <a:r>
-              <a:rPr lang="en-US" sz="1050" dirty="0">
-                <a:solidFill>
-                  <a:srgbClr val="F1F5F9"/>
-                </a:solidFill>
-                <a:latin typeface="Calibri" pitchFamily="34" charset="0"/>
-                <a:ea typeface="Calibri" pitchFamily="34" charset="-122"/>
-                <a:cs typeface="Calibri" pitchFamily="34" charset="-120"/>
-              </a:rPr>
-              <a:t>map() returns a lazy object — always wrap with list() to see values.</a:t>
-            </a:r>
-            <a:endParaRPr lang="en-US" sz="1050" dirty="0"/>
-          </a:p>
-        </p:txBody>
-      </p:sp>
-      <p:sp>
-        <p:nvSpPr>
-          <p:cNvPr id="43" name="Shape 41"/>
-          <p:cNvSpPr/>
-          <p:nvPr/>
-        </p:nvSpPr>
-        <p:spPr>
-          <a:xfrm>
-            <a:off x="4572000" y="4315968"/>
-            <a:ext cx="4206240" cy="640080"/>
-          </a:xfrm>
-          <a:prstGeom prst="rect">
-            <a:avLst/>
-          </a:prstGeom>
-          <a:solidFill>
-            <a:srgbClr val="1A1D27"/>
-          </a:solidFill>
-          <a:ln w="12700">
-            <a:solidFill>
-              <a:srgbClr val="34D399"/>
-            </a:solidFill>
-            <a:prstDash val="solid"/>
-          </a:ln>
-        </p:spPr>
-      </p:sp>
-      <p:sp>
-        <p:nvSpPr>
-          <p:cNvPr id="44" name="Text 42"/>
-          <p:cNvSpPr/>
-          <p:nvPr/>
-        </p:nvSpPr>
-        <p:spPr>
-          <a:xfrm>
-            <a:off x="4709160" y="4343400"/>
-            <a:ext cx="3931920" cy="228600"/>
-          </a:xfrm>
-          <a:prstGeom prst="rect">
-            <a:avLst/>
-          </a:prstGeom>
-          <a:noFill/>
-          <a:ln/>
-        </p:spPr>
-        <p:txBody>
-          <a:bodyPr wrap="square" rtlCol="0" anchor="ctr"/>
-          <a:lstStyle/>
-          <a:p>
-            <a:pPr marL="0" indent="0">
-              <a:buNone/>
-            </a:pPr>
-            <a:r>
-              <a:rPr lang="en-US" sz="1100" b="1" dirty="0">
-                <a:solidFill>
-                  <a:srgbClr val="34D399"/>
-                </a:solidFill>
-                <a:latin typeface="Calibri" pitchFamily="34" charset="0"/>
-                <a:ea typeface="Calibri" pitchFamily="34" charset="-122"/>
-                <a:cs typeface="Calibri" pitchFamily="34" charset="-120"/>
-              </a:rPr>
-              <a:t>map vs list comprehension</a:t>
-            </a:r>
-            <a:endParaRPr lang="en-US" sz="1100" dirty="0"/>
-          </a:p>
-        </p:txBody>
-      </p:sp>
-      <p:sp>
-        <p:nvSpPr>
-          <p:cNvPr id="45" name="Text 43"/>
-          <p:cNvSpPr/>
-          <p:nvPr/>
-        </p:nvSpPr>
-        <p:spPr>
-          <a:xfrm>
-            <a:off x="4709160" y="4562856"/>
-            <a:ext cx="3931920" cy="347472"/>
-          </a:xfrm>
-          <a:prstGeom prst="rect">
-            <a:avLst/>
-          </a:prstGeom>
-          <a:noFill/>
-          <a:ln/>
-        </p:spPr>
-        <p:txBody>
-          <a:bodyPr wrap="square" rtlCol="0" anchor="ctr"/>
-          <a:lstStyle/>
-          <a:p>
-            <a:pPr marL="0" indent="0">
-              <a:buNone/>
-            </a:pPr>
-            <a:r>
-              <a:rPr lang="en-US" sz="1000" b="1" dirty="0">
-                <a:solidFill>
-                  <a:srgbClr val="4F9CF9"/>
-                </a:solidFill>
-                <a:latin typeface="Consolas" pitchFamily="34" charset="0"/>
-                <a:ea typeface="Consolas" pitchFamily="34" charset="-122"/>
-                <a:cs typeface="Consolas" pitchFamily="34" charset="-120"/>
-              </a:rPr>
-              <a:t>map(): </a:t>
-            </a:r>
-            <a:r>
-              <a:rPr lang="en-US" sz="1000" dirty="0">
-                <a:solidFill>
-                  <a:srgbClr val="F1F5F9"/>
-                </a:solidFill>
-                <a:latin typeface="Calibri" pitchFamily="34" charset="0"/>
-                <a:ea typeface="Calibri" pitchFamily="34" charset="-122"/>
-                <a:cs typeface="Calibri" pitchFamily="34" charset="-120"/>
-              </a:rPr>
-              <a:t>functional style, slightly faster on large data  </a:t>
-            </a:r>
-            <a:r>
-              <a:rPr lang="en-US" sz="1000" dirty="0">
-                <a:solidFill>
-                  <a:srgbClr val="A78BFA"/>
-                </a:solidFill>
-                <a:latin typeface="Consolas" pitchFamily="34" charset="0"/>
-                <a:ea typeface="Consolas" pitchFamily="34" charset="-122"/>
-                <a:cs typeface="Consolas" pitchFamily="34" charset="-120"/>
-              </a:rPr>
-              <a:t>[x**2 for x in nums]</a:t>
-            </a:r>
-            <a:r>
-              <a:rPr lang="en-US" sz="1000" dirty="0">
-                <a:solidFill>
-                  <a:srgbClr val="F1F5F9"/>
-                </a:solidFill>
-                <a:latin typeface="Calibri" pitchFamily="34" charset="0"/>
-                <a:ea typeface="Calibri" pitchFamily="34" charset="-122"/>
-                <a:cs typeface="Calibri" pitchFamily="34" charset="-120"/>
-              </a:rPr>
-              <a:t>: more Pythonic, easier to read</a:t>
-            </a:r>
-            <a:endParaRPr lang="en-US" sz="1000" dirty="0"/>
-          </a:p>
-        </p:txBody>
-      </p:sp>
-    </p:spTree>
-  </p:cSld>
-  <p:clrMapOvr>
-    <a:masterClrMapping/>
-  </p:clrMapOvr>
-</p:sld>
-</file>
-
-<file path=ppt/slides/slide8.xml><?xml version="1.0" encoding="utf-8"?>
-<p:sld xmlns:a="http://schemas.openxmlformats.org/drawingml/2006/main" xmlns:r="http://schemas.openxmlformats.org/officeDocument/2006/relationships" xmlns:p="http://schemas.openxmlformats.org/presentationml/2006/main">
-  <p:cSld name="Slide 6">
-    <p:bg>
-      <p:bgPr>
-        <a:solidFill>
-          <a:srgbClr val="0F1117"/>
-        </a:solidFill>
-        <a:effectLst/>
-      </p:bgPr>
-    </p:bg>
-    <p:spTree>
-      <p:nvGrpSpPr>
-        <p:cNvPr id="1" name=""/>
-        <p:cNvGrpSpPr/>
-        <p:nvPr/>
-      </p:nvGrpSpPr>
-      <p:grpSpPr>
-        <a:xfrm>
-          <a:off x="0" y="0"/>
-          <a:ext cx="0" cy="0"/>
-          <a:chOff x="0" y="0"/>
-          <a:chExt cx="0" cy="0"/>
-        </a:xfrm>
-      </p:grpSpPr>
-      <p:sp>
-        <p:nvSpPr>
-          <p:cNvPr id="2" name="Text 0"/>
-          <p:cNvSpPr/>
-          <p:nvPr/>
-        </p:nvSpPr>
-        <p:spPr>
-          <a:xfrm>
-            <a:off x="457200" y="274320"/>
-            <a:ext cx="8229600" cy="640080"/>
-          </a:xfrm>
-          <a:prstGeom prst="rect">
-            <a:avLst/>
-          </a:prstGeom>
-          <a:noFill/>
-          <a:ln/>
-        </p:spPr>
-        <p:txBody>
-          <a:bodyPr wrap="square" rtlCol="0" anchor="ctr"/>
-          <a:lstStyle/>
-          <a:p>
-            <a:pPr marL="0" indent="0" algn="l">
-              <a:buNone/>
-            </a:pPr>
-            <a:r>
-              <a:rPr lang="en-US" sz="3000" b="1" dirty="0">
-                <a:solidFill>
-                  <a:srgbClr val="F1F5F9"/>
-                </a:solidFill>
-                <a:latin typeface="Calibri" pitchFamily="34" charset="0"/>
-                <a:ea typeface="Calibri" pitchFamily="34" charset="-122"/>
-                <a:cs typeface="Calibri" pitchFamily="34" charset="-120"/>
-              </a:rPr>
-              <a:t>Stage 4 — Lambda Functions</a:t>
-            </a:r>
-            <a:endParaRPr lang="en-US" sz="3000" dirty="0"/>
-          </a:p>
-        </p:txBody>
-      </p:sp>
-      <p:sp>
-        <p:nvSpPr>
-          <p:cNvPr id="3" name="Shape 1"/>
-          <p:cNvSpPr/>
-          <p:nvPr/>
-        </p:nvSpPr>
-        <p:spPr>
-          <a:xfrm>
-            <a:off x="457200" y="987552"/>
-            <a:ext cx="8229600" cy="36576"/>
-          </a:xfrm>
-          <a:prstGeom prst="rect">
-            <a:avLst/>
-          </a:prstGeom>
-          <a:solidFill>
-            <a:srgbClr val="4F9CF9"/>
-          </a:solidFill>
-          <a:ln w="12700">
-            <a:solidFill>
-              <a:srgbClr val="4F9CF9"/>
-            </a:solidFill>
-            <a:prstDash val="solid"/>
-          </a:ln>
-        </p:spPr>
-      </p:sp>
-      <p:sp>
-        <p:nvSpPr>
-          <p:cNvPr id="4" name="Text 2"/>
-          <p:cNvSpPr/>
-          <p:nvPr/>
-        </p:nvSpPr>
-        <p:spPr>
-          <a:xfrm>
-            <a:off x="457200" y="1143000"/>
-            <a:ext cx="8229600" cy="274320"/>
-          </a:xfrm>
-          <a:prstGeom prst="rect">
-            <a:avLst/>
-          </a:prstGeom>
-          <a:noFill/>
-          <a:ln/>
-        </p:spPr>
-        <p:txBody>
-          <a:bodyPr wrap="square" rtlCol="0" anchor="ctr"/>
-          <a:lstStyle/>
-          <a:p>
-            <a:pPr marL="0" indent="0">
-              <a:buNone/>
-            </a:pPr>
-            <a:r>
-              <a:rPr lang="en-US" sz="1300" i="1" dirty="0">
-                <a:solidFill>
-                  <a:srgbClr val="8B95A8"/>
-                </a:solidFill>
-                <a:latin typeface="Calibri" pitchFamily="34" charset="0"/>
-                <a:ea typeface="Calibri" pitchFamily="34" charset="-122"/>
-                <a:cs typeface="Calibri" pitchFamily="34" charset="-120"/>
-              </a:rPr>
-              <a:t>The Problem — A function used just once clogs your code:</a:t>
-            </a:r>
-            <a:endParaRPr lang="en-US" sz="1300" dirty="0"/>
-          </a:p>
-        </p:txBody>
-      </p:sp>
-      <p:sp>
-        <p:nvSpPr>
-          <p:cNvPr id="5" name="Text 3"/>
-          <p:cNvSpPr/>
-          <p:nvPr/>
-        </p:nvSpPr>
-        <p:spPr>
-          <a:xfrm>
-            <a:off x="457200" y="1463040"/>
-            <a:ext cx="3931920" cy="274320"/>
-          </a:xfrm>
-          <a:prstGeom prst="rect">
-            <a:avLst/>
-          </a:prstGeom>
-          <a:noFill/>
-          <a:ln/>
-        </p:spPr>
-        <p:txBody>
-          <a:bodyPr wrap="square" rtlCol="0" anchor="ctr"/>
-          <a:lstStyle/>
-          <a:p>
-            <a:pPr marL="0" indent="0">
-              <a:buNone/>
-            </a:pPr>
-            <a:r>
-              <a:rPr lang="en-US" sz="1300" b="1" dirty="0">
-                <a:solidFill>
-                  <a:srgbClr val="F59E0B"/>
-                </a:solidFill>
-                <a:latin typeface="Calibri" pitchFamily="34" charset="0"/>
-                <a:ea typeface="Calibri" pitchFamily="34" charset="-122"/>
-                <a:cs typeface="Calibri" pitchFamily="34" charset="-120"/>
-              </a:rPr>
-              <a:t>😩  Regular (verbose)</a:t>
-            </a:r>
-            <a:endParaRPr lang="en-US" sz="1300" dirty="0"/>
-          </a:p>
-        </p:txBody>
-      </p:sp>
-      <p:sp>
-        <p:nvSpPr>
-          <p:cNvPr id="6" name="Shape 4"/>
-          <p:cNvSpPr/>
-          <p:nvPr/>
-        </p:nvSpPr>
-        <p:spPr>
-          <a:xfrm>
-            <a:off x="457200" y="1783080"/>
-            <a:ext cx="3931920" cy="1920240"/>
-          </a:xfrm>
-          <a:prstGeom prst="rect">
-            <a:avLst/>
-          </a:prstGeom>
-          <a:solidFill>
-            <a:srgbClr val="161B22"/>
-          </a:solidFill>
-          <a:ln w="12700">
-            <a:solidFill>
-              <a:srgbClr val="4F9CF9"/>
-            </a:solidFill>
-            <a:prstDash val="solid"/>
-          </a:ln>
-        </p:spPr>
-      </p:sp>
-      <p:sp>
-        <p:nvSpPr>
-          <p:cNvPr id="7" name="Text 5"/>
-          <p:cNvSpPr/>
-          <p:nvPr/>
-        </p:nvSpPr>
-        <p:spPr>
-          <a:xfrm>
-            <a:off x="594360" y="1892808"/>
-            <a:ext cx="3657600" cy="1737360"/>
-          </a:xfrm>
-          <a:prstGeom prst="rect">
-            <a:avLst/>
-          </a:prstGeom>
-          <a:noFill/>
-          <a:ln/>
-        </p:spPr>
-        <p:txBody>
-          <a:bodyPr wrap="square" rtlCol="0" anchor="ctr"/>
-          <a:lstStyle/>
-          <a:p>
-            <a:pPr marL="0" indent="0">
-              <a:buNone/>
-            </a:pPr>
-            <a:r>
-              <a:rPr lang="en-US" sz="1200" dirty="0">
-                <a:solidFill>
-                  <a:srgbClr val="4F9CF9"/>
-                </a:solidFill>
-                <a:latin typeface="Consolas" pitchFamily="34" charset="0"/>
-                <a:ea typeface="Consolas" pitchFamily="34" charset="-122"/>
-                <a:cs typeface="Consolas" pitchFamily="34" charset="-120"/>
-              </a:rPr>
-              <a:t>def square(x):</a:t>
-            </a:r>
-            <a:endParaRPr lang="en-US" sz="1200" dirty="0"/>
-          </a:p>
-          <a:p>
-            <a:pPr marL="0" indent="0">
-              <a:buNone/>
-            </a:pPr>
-            <a:r>
-              <a:rPr lang="en-US" sz="1200" dirty="0">
-                <a:solidFill>
-                  <a:srgbClr val="4F9CF9"/>
-                </a:solidFill>
-                <a:latin typeface="Consolas" pitchFamily="34" charset="0"/>
-                <a:ea typeface="Consolas" pitchFamily="34" charset="-122"/>
-                <a:cs typeface="Consolas" pitchFamily="34" charset="-120"/>
-              </a:rPr>
-              <a:t>    return x ** 2</a:t>
-            </a:r>
-            <a:endParaRPr lang="en-US" sz="1200" dirty="0"/>
-          </a:p>
-          <a:p>
-            <a:pPr marL="0" indent="0">
-              <a:buNone/>
-            </a:pPr>
-            <a:endParaRPr lang="en-US" sz="1200" dirty="0"/>
-          </a:p>
-          <a:p>
-            <a:pPr marL="0" indent="0">
-              <a:buNone/>
-            </a:pPr>
-            <a:r>
-              <a:rPr lang="en-US" sz="1200" dirty="0">
-                <a:solidFill>
-                  <a:srgbClr val="79C0FF"/>
-                </a:solidFill>
-                <a:latin typeface="Consolas" pitchFamily="34" charset="0"/>
-                <a:ea typeface="Consolas" pitchFamily="34" charset="-122"/>
-                <a:cs typeface="Consolas" pitchFamily="34" charset="-120"/>
-              </a:rPr>
-              <a:t>nums = [1, 2, 3, 4, 5]</a:t>
-            </a:r>
-            <a:endParaRPr lang="en-US" sz="1200" dirty="0"/>
-          </a:p>
-          <a:p>
-            <a:pPr marL="0" indent="0">
-              <a:buNone/>
-            </a:pPr>
-            <a:r>
-              <a:rPr lang="en-US" sz="1200" dirty="0">
-                <a:solidFill>
-                  <a:srgbClr val="79C0FF"/>
-                </a:solidFill>
-                <a:latin typeface="Consolas" pitchFamily="34" charset="0"/>
-                <a:ea typeface="Consolas" pitchFamily="34" charset="-122"/>
-                <a:cs typeface="Consolas" pitchFamily="34" charset="-120"/>
-              </a:rPr>
-              <a:t>result = list(map(square, nums))</a:t>
-            </a:r>
-            <a:endParaRPr lang="en-US" sz="1200" dirty="0"/>
-          </a:p>
-          <a:p>
-            <a:pPr marL="0" indent="0">
-              <a:buNone/>
-            </a:pPr>
-            <a:r>
-              <a:rPr lang="en-US" sz="1200" dirty="0">
-                <a:solidFill>
-                  <a:srgbClr val="6A9955"/>
-                </a:solidFill>
-                <a:latin typeface="Consolas" pitchFamily="34" charset="0"/>
-                <a:ea typeface="Consolas" pitchFamily="34" charset="-122"/>
-                <a:cs typeface="Consolas" pitchFamily="34" charset="-120"/>
-              </a:rPr>
-              <a:t># [1, 4, 9, 16, 25]</a:t>
-            </a:r>
-            <a:endParaRPr lang="en-US" sz="1200" dirty="0"/>
-          </a:p>
-        </p:txBody>
-      </p:sp>
-      <p:sp>
-        <p:nvSpPr>
-          <p:cNvPr id="8" name="Text 6"/>
-          <p:cNvSpPr/>
-          <p:nvPr/>
-        </p:nvSpPr>
-        <p:spPr>
-          <a:xfrm>
-            <a:off x="4754880" y="1463040"/>
-            <a:ext cx="3931920" cy="274320"/>
-          </a:xfrm>
-          <a:prstGeom prst="rect">
-            <a:avLst/>
-          </a:prstGeom>
-          <a:noFill/>
-          <a:ln/>
-        </p:spPr>
-        <p:txBody>
-          <a:bodyPr wrap="square" rtlCol="0" anchor="ctr"/>
-          <a:lstStyle/>
-          <a:p>
-            <a:pPr marL="0" indent="0">
-              <a:buNone/>
-            </a:pPr>
-            <a:r>
-              <a:rPr lang="en-US" sz="1300" b="1" dirty="0">
-                <a:solidFill>
-                  <a:srgbClr val="34D399"/>
-                </a:solidFill>
-                <a:latin typeface="Calibri" pitchFamily="34" charset="0"/>
-                <a:ea typeface="Calibri" pitchFamily="34" charset="-122"/>
-                <a:cs typeface="Calibri" pitchFamily="34" charset="-120"/>
-              </a:rPr>
-              <a:t>✅  Lambda (concise)</a:t>
-            </a:r>
-            <a:endParaRPr lang="en-US" sz="1300" dirty="0"/>
-          </a:p>
-        </p:txBody>
-      </p:sp>
-      <p:sp>
-        <p:nvSpPr>
-          <p:cNvPr id="9" name="Shape 7"/>
-          <p:cNvSpPr/>
-          <p:nvPr/>
-        </p:nvSpPr>
-        <p:spPr>
-          <a:xfrm>
-            <a:off x="4754880" y="1783080"/>
-            <a:ext cx="3931920" cy="1920240"/>
-          </a:xfrm>
-          <a:prstGeom prst="rect">
-            <a:avLst/>
-          </a:prstGeom>
-          <a:solidFill>
-            <a:srgbClr val="161B22"/>
-          </a:solidFill>
-          <a:ln w="12700">
-            <a:solidFill>
-              <a:srgbClr val="4F9CF9"/>
-            </a:solidFill>
-            <a:prstDash val="solid"/>
-          </a:ln>
-        </p:spPr>
-      </p:sp>
-      <p:sp>
-        <p:nvSpPr>
-          <p:cNvPr id="10" name="Text 8"/>
-          <p:cNvSpPr/>
-          <p:nvPr/>
-        </p:nvSpPr>
-        <p:spPr>
-          <a:xfrm>
-            <a:off x="4892040" y="1892808"/>
-            <a:ext cx="3657600" cy="1737360"/>
-          </a:xfrm>
-          <a:prstGeom prst="rect">
-            <a:avLst/>
-          </a:prstGeom>
-          <a:noFill/>
-          <a:ln/>
-        </p:spPr>
-        <p:txBody>
-          <a:bodyPr wrap="square" rtlCol="0" anchor="ctr"/>
-          <a:lstStyle/>
-          <a:p>
-            <a:pPr marL="0" indent="0">
-              <a:buNone/>
-            </a:pPr>
-            <a:r>
-              <a:rPr lang="en-US" sz="1200" dirty="0">
-                <a:solidFill>
-                  <a:srgbClr val="79C0FF"/>
-                </a:solidFill>
-                <a:latin typeface="Consolas" pitchFamily="34" charset="0"/>
-                <a:ea typeface="Consolas" pitchFamily="34" charset="-122"/>
-                <a:cs typeface="Consolas" pitchFamily="34" charset="-120"/>
-              </a:rPr>
-              <a:t>nums = [1, 2, 3, 4, 5]</a:t>
-            </a:r>
-            <a:endParaRPr lang="en-US" sz="1200" dirty="0"/>
-          </a:p>
-          <a:p>
-            <a:pPr marL="0" indent="0">
-              <a:buNone/>
-            </a:pPr>
-            <a:r>
-              <a:rPr lang="en-US" sz="1200" dirty="0">
-                <a:solidFill>
-                  <a:srgbClr val="79C0FF"/>
-                </a:solidFill>
-                <a:latin typeface="Consolas" pitchFamily="34" charset="0"/>
-                <a:ea typeface="Consolas" pitchFamily="34" charset="-122"/>
-                <a:cs typeface="Consolas" pitchFamily="34" charset="-120"/>
-              </a:rPr>
-              <a:t>result = list(map(</a:t>
-            </a:r>
-            <a:endParaRPr lang="en-US" sz="1200" dirty="0"/>
-          </a:p>
-          <a:p>
-            <a:pPr marL="0" indent="0">
-              <a:buNone/>
-            </a:pPr>
-            <a:r>
-              <a:rPr lang="en-US" sz="1200" dirty="0">
-                <a:solidFill>
-                  <a:srgbClr val="4F9CF9"/>
-                </a:solidFill>
-                <a:latin typeface="Consolas" pitchFamily="34" charset="0"/>
-                <a:ea typeface="Consolas" pitchFamily="34" charset="-122"/>
-                <a:cs typeface="Consolas" pitchFamily="34" charset="-120"/>
-              </a:rPr>
-              <a:t>    lambda x: x ** 2, nums</a:t>
-            </a:r>
-            <a:endParaRPr lang="en-US" sz="1200" dirty="0"/>
-          </a:p>
-          <a:p>
-            <a:pPr marL="0" indent="0">
-              <a:buNone/>
-            </a:pPr>
-            <a:r>
-              <a:rPr lang="en-US" sz="1200" dirty="0">
-                <a:solidFill>
-                  <a:srgbClr val="79C0FF"/>
-                </a:solidFill>
-                <a:latin typeface="Consolas" pitchFamily="34" charset="0"/>
-                <a:ea typeface="Consolas" pitchFamily="34" charset="-122"/>
-                <a:cs typeface="Consolas" pitchFamily="34" charset="-120"/>
-              </a:rPr>
-              <a:t>))</a:t>
-            </a:r>
-            <a:endParaRPr lang="en-US" sz="1200" dirty="0"/>
-          </a:p>
-          <a:p>
-            <a:pPr marL="0" indent="0">
-              <a:buNone/>
-            </a:pPr>
-            <a:r>
-              <a:rPr lang="en-US" sz="1200" dirty="0">
-                <a:solidFill>
-                  <a:srgbClr val="6A9955"/>
-                </a:solidFill>
-                <a:latin typeface="Consolas" pitchFamily="34" charset="0"/>
-                <a:ea typeface="Consolas" pitchFamily="34" charset="-122"/>
-                <a:cs typeface="Consolas" pitchFamily="34" charset="-120"/>
-              </a:rPr>
-              <a:t># [1, 4, 9, 16, 25]</a:t>
-            </a:r>
-            <a:endParaRPr lang="en-US" sz="1200" dirty="0"/>
-          </a:p>
-          <a:p>
-            <a:pPr marL="0" indent="0">
-              <a:buNone/>
-            </a:pPr>
-            <a:endParaRPr lang="en-US" sz="1200" dirty="0"/>
-          </a:p>
-        </p:txBody>
-      </p:sp>
-      <p:sp>
-        <p:nvSpPr>
-          <p:cNvPr id="11" name="Shape 9"/>
-          <p:cNvSpPr/>
-          <p:nvPr/>
-        </p:nvSpPr>
-        <p:spPr>
-          <a:xfrm>
-            <a:off x="457200" y="3794760"/>
-            <a:ext cx="8229600" cy="1143000"/>
-          </a:xfrm>
-          <a:prstGeom prst="rect">
-            <a:avLst/>
-          </a:prstGeom>
-          <a:solidFill>
-            <a:srgbClr val="131B2E"/>
-          </a:solidFill>
-          <a:ln w="12700">
-            <a:solidFill>
-              <a:srgbClr val="4F9CF9"/>
-            </a:solidFill>
-            <a:prstDash val="solid"/>
-          </a:ln>
-        </p:spPr>
-      </p:sp>
-      <p:sp>
-        <p:nvSpPr>
-          <p:cNvPr id="12" name="Text 10"/>
-          <p:cNvSpPr/>
-          <p:nvPr/>
-        </p:nvSpPr>
-        <p:spPr>
-          <a:xfrm>
-            <a:off x="640080" y="3840480"/>
-            <a:ext cx="7863840" cy="256032"/>
-          </a:xfrm>
-          <a:prstGeom prst="rect">
-            <a:avLst/>
-          </a:prstGeom>
-          <a:noFill/>
-          <a:ln/>
-        </p:spPr>
-        <p:txBody>
-          <a:bodyPr wrap="square" rtlCol="0" anchor="ctr"/>
-          <a:lstStyle/>
-          <a:p>
-            <a:pPr marL="0" indent="0">
-              <a:buNone/>
-            </a:pPr>
-            <a:r>
-              <a:rPr lang="en-US" sz="1300" b="1" dirty="0">
-                <a:solidFill>
-                  <a:srgbClr val="4F9CF9"/>
-                </a:solidFill>
-                <a:latin typeface="Calibri" pitchFamily="34" charset="0"/>
-                <a:ea typeface="Calibri" pitchFamily="34" charset="-122"/>
-                <a:cs typeface="Calibri" pitchFamily="34" charset="-120"/>
-              </a:rPr>
-              <a:t>🔑  The Translation Rule:</a:t>
-            </a:r>
-            <a:endParaRPr lang="en-US" sz="1300" dirty="0"/>
-          </a:p>
-        </p:txBody>
-      </p:sp>
-      <p:sp>
-        <p:nvSpPr>
-          <p:cNvPr id="13" name="Text 11"/>
-          <p:cNvSpPr/>
-          <p:nvPr/>
-        </p:nvSpPr>
-        <p:spPr>
-          <a:xfrm>
-            <a:off x="640080" y="4133088"/>
-            <a:ext cx="7863840" cy="749808"/>
-          </a:xfrm>
-          <a:prstGeom prst="rect">
-            <a:avLst/>
-          </a:prstGeom>
-          <a:noFill/>
-          <a:ln/>
-        </p:spPr>
-        <p:txBody>
-          <a:bodyPr wrap="square" rtlCol="0" anchor="ctr"/>
-          <a:lstStyle/>
-          <a:p>
-            <a:pPr marL="0" indent="0">
-              <a:buNone/>
-            </a:pPr>
-            <a:r>
-              <a:rPr lang="en-US" sz="1300" b="1" dirty="0">
-                <a:solidFill>
-                  <a:srgbClr val="79C0FF"/>
-                </a:solidFill>
-                <a:latin typeface="Consolas" pitchFamily="34" charset="0"/>
-                <a:ea typeface="Consolas" pitchFamily="34" charset="-122"/>
-                <a:cs typeface="Consolas" pitchFamily="34" charset="-120"/>
-              </a:rPr>
-              <a:t>lambda  x  :  x ** 2</a:t>
-            </a:r>
-            <a:endParaRPr lang="en-US" sz="1300" dirty="0"/>
-          </a:p>
-          <a:p>
-            <a:pPr marL="0" indent="0">
-              <a:buNone/>
-            </a:pPr>
-            <a:r>
-              <a:rPr lang="en-US" sz="1100" dirty="0">
-                <a:solidFill>
-                  <a:srgbClr val="8B95A8"/>
-                </a:solidFill>
-                <a:latin typeface="Consolas" pitchFamily="34" charset="0"/>
-                <a:ea typeface="Consolas" pitchFamily="34" charset="-122"/>
-                <a:cs typeface="Consolas" pitchFamily="34" charset="-120"/>
-              </a:rPr>
-              <a:t>   ↑       ↑     ↑</a:t>
-            </a:r>
-            <a:endParaRPr lang="en-US" sz="1300" dirty="0"/>
-          </a:p>
-          <a:p>
-            <a:pPr marL="0" indent="0">
-              <a:buNone/>
-            </a:pPr>
-            <a:r>
-              <a:rPr lang="en-US" sz="1100" dirty="0">
-                <a:solidFill>
-                  <a:srgbClr val="34D399"/>
-                </a:solidFill>
-                <a:latin typeface="Consolas" pitchFamily="34" charset="0"/>
-                <a:ea typeface="Consolas" pitchFamily="34" charset="-122"/>
-                <a:cs typeface="Consolas" pitchFamily="34" charset="-120"/>
-              </a:rPr>
-              <a:t>keyword  input  expression (auto-returned)</a:t>
-            </a:r>
-            <a:endParaRPr lang="en-US" sz="1300" dirty="0"/>
-          </a:p>
-        </p:txBody>
-      </p:sp>
-    </p:spTree>
-  </p:cSld>
-  <p:clrMapOvr>
-    <a:masterClrMapping/>
-  </p:clrMapOvr>
-</p:sld>
-</file>
-
-<file path=ppt/slides/slide9.xml><?xml version="1.0" encoding="utf-8"?>
-<p:sld xmlns:a="http://schemas.openxmlformats.org/drawingml/2006/main" xmlns:r="http://schemas.openxmlformats.org/officeDocument/2006/relationships" xmlns:p="http://schemas.openxmlformats.org/presentationml/2006/main">
   <p:cSld name="Slide 7">
     <p:bg>
       <p:bgPr>
@@ -13229,6 +9469,1023 @@
               <a:t>Logic is complex • Reused multiple times • Needs a name</a:t>
             </a:r>
             <a:endParaRPr lang="en-US" sz="1100" dirty="0"/>
+          </a:p>
+        </p:txBody>
+      </p:sp>
+    </p:spTree>
+  </p:cSld>
+  <p:clrMapOvr>
+    <a:masterClrMapping/>
+  </p:clrMapOvr>
+</p:sld>
+</file>
+
+<file path=ppt/slides/slide8.xml><?xml version="1.0" encoding="utf-8"?>
+<p:sld xmlns:a="http://schemas.openxmlformats.org/drawingml/2006/main" xmlns:r="http://schemas.openxmlformats.org/officeDocument/2006/relationships" xmlns:p="http://schemas.openxmlformats.org/presentationml/2006/main">
+  <p:cSld name="Slide 8">
+    <p:bg>
+      <p:bgPr>
+        <a:solidFill>
+          <a:srgbClr val="0F1117"/>
+        </a:solidFill>
+        <a:effectLst/>
+      </p:bgPr>
+    </p:bg>
+    <p:spTree>
+      <p:nvGrpSpPr>
+        <p:cNvPr id="1" name=""/>
+        <p:cNvGrpSpPr/>
+        <p:nvPr/>
+      </p:nvGrpSpPr>
+      <p:grpSpPr>
+        <a:xfrm>
+          <a:off x="0" y="0"/>
+          <a:ext cx="0" cy="0"/>
+          <a:chOff x="0" y="0"/>
+          <a:chExt cx="0" cy="0"/>
+        </a:xfrm>
+      </p:grpSpPr>
+      <p:sp>
+        <p:nvSpPr>
+          <p:cNvPr id="2" name="Text 0"/>
+          <p:cNvSpPr/>
+          <p:nvPr/>
+        </p:nvSpPr>
+        <p:spPr>
+          <a:xfrm>
+            <a:off x="457200" y="274320"/>
+            <a:ext cx="8229600" cy="640080"/>
+          </a:xfrm>
+          <a:prstGeom prst="rect">
+            <a:avLst/>
+          </a:prstGeom>
+          <a:noFill/>
+          <a:ln/>
+        </p:spPr>
+        <p:txBody>
+          <a:bodyPr wrap="square" rtlCol="0" anchor="ctr"/>
+          <a:lstStyle/>
+          <a:p>
+            <a:pPr marL="0" indent="0" algn="l">
+              <a:buNone/>
+            </a:pPr>
+            <a:r>
+              <a:rPr lang="en-US" sz="3000" b="1" dirty="0">
+                <a:solidFill>
+                  <a:srgbClr val="F1F5F9"/>
+                </a:solidFill>
+                <a:latin typeface="Calibri" pitchFamily="34" charset="0"/>
+                <a:ea typeface="Calibri" pitchFamily="34" charset="-122"/>
+                <a:cs typeface="Calibri" pitchFamily="34" charset="-120"/>
+              </a:rPr>
+              <a:t>Stage 5 — *args (Variable Positional)</a:t>
+            </a:r>
+            <a:endParaRPr lang="en-US" sz="3000" dirty="0"/>
+          </a:p>
+        </p:txBody>
+      </p:sp>
+      <p:sp>
+        <p:nvSpPr>
+          <p:cNvPr id="3" name="Shape 1"/>
+          <p:cNvSpPr/>
+          <p:nvPr/>
+        </p:nvSpPr>
+        <p:spPr>
+          <a:xfrm>
+            <a:off x="457200" y="987552"/>
+            <a:ext cx="8229600" cy="36576"/>
+          </a:xfrm>
+          <a:prstGeom prst="rect">
+            <a:avLst/>
+          </a:prstGeom>
+          <a:solidFill>
+            <a:srgbClr val="34D399"/>
+          </a:solidFill>
+          <a:ln w="12700">
+            <a:solidFill>
+              <a:srgbClr val="34D399"/>
+            </a:solidFill>
+            <a:prstDash val="solid"/>
+          </a:ln>
+        </p:spPr>
+      </p:sp>
+      <p:sp>
+        <p:nvSpPr>
+          <p:cNvPr id="4" name="Text 2"/>
+          <p:cNvSpPr/>
+          <p:nvPr/>
+        </p:nvSpPr>
+        <p:spPr>
+          <a:xfrm>
+            <a:off x="457200" y="1143000"/>
+            <a:ext cx="8229600" cy="274320"/>
+          </a:xfrm>
+          <a:prstGeom prst="rect">
+            <a:avLst/>
+          </a:prstGeom>
+          <a:noFill/>
+          <a:ln/>
+        </p:spPr>
+        <p:txBody>
+          <a:bodyPr wrap="square" rtlCol="0" anchor="ctr"/>
+          <a:lstStyle/>
+          <a:p>
+            <a:pPr marL="0" indent="0">
+              <a:buNone/>
+            </a:pPr>
+            <a:r>
+              <a:rPr lang="en-US" sz="1300" i="1" dirty="0">
+                <a:solidFill>
+                  <a:srgbClr val="8B95A8"/>
+                </a:solidFill>
+                <a:latin typeface="Calibri" pitchFamily="34" charset="0"/>
+                <a:ea typeface="Calibri" pitchFamily="34" charset="-122"/>
+                <a:cs typeface="Calibri" pitchFamily="34" charset="-120"/>
+              </a:rPr>
+              <a:t>Problem: How many numbers will the user pass? We don't know in advance!</a:t>
+            </a:r>
+            <a:endParaRPr lang="en-US" sz="1300" dirty="0"/>
+          </a:p>
+        </p:txBody>
+      </p:sp>
+      <p:sp>
+        <p:nvSpPr>
+          <p:cNvPr id="5" name="Shape 3"/>
+          <p:cNvSpPr/>
+          <p:nvPr/>
+        </p:nvSpPr>
+        <p:spPr>
+          <a:xfrm>
+            <a:off x="457200" y="1463040"/>
+            <a:ext cx="8229600" cy="3246120"/>
+          </a:xfrm>
+          <a:prstGeom prst="rect">
+            <a:avLst/>
+          </a:prstGeom>
+          <a:solidFill>
+            <a:srgbClr val="161B22"/>
+          </a:solidFill>
+          <a:ln w="12700">
+            <a:solidFill>
+              <a:srgbClr val="4F9CF9"/>
+            </a:solidFill>
+            <a:prstDash val="solid"/>
+          </a:ln>
+        </p:spPr>
+      </p:sp>
+      <p:sp>
+        <p:nvSpPr>
+          <p:cNvPr id="6" name="Text 4"/>
+          <p:cNvSpPr/>
+          <p:nvPr/>
+        </p:nvSpPr>
+        <p:spPr>
+          <a:xfrm>
+            <a:off x="594360" y="1572768"/>
+            <a:ext cx="7955280" cy="3063240"/>
+          </a:xfrm>
+          <a:prstGeom prst="rect">
+            <a:avLst/>
+          </a:prstGeom>
+          <a:noFill/>
+          <a:ln/>
+        </p:spPr>
+        <p:txBody>
+          <a:bodyPr wrap="square" rtlCol="0" anchor="ctr"/>
+          <a:lstStyle/>
+          <a:p>
+            <a:pPr marL="0" indent="0">
+              <a:buNone/>
+            </a:pPr>
+            <a:r>
+              <a:rPr lang="en-US" sz="1200" dirty="0">
+                <a:solidFill>
+                  <a:srgbClr val="4F9CF9"/>
+                </a:solidFill>
+                <a:latin typeface="Consolas" pitchFamily="34" charset="0"/>
+                <a:ea typeface="Consolas" pitchFamily="34" charset="-122"/>
+                <a:cs typeface="Consolas" pitchFamily="34" charset="-120"/>
+              </a:rPr>
+              <a:t>def add_all(*numbers):          # * collects extras into a tuple</a:t>
+            </a:r>
+            <a:endParaRPr lang="en-US" sz="1200" dirty="0"/>
+          </a:p>
+          <a:p>
+            <a:pPr marL="0" indent="0">
+              <a:buNone/>
+            </a:pPr>
+            <a:r>
+              <a:rPr lang="en-US" sz="1200" dirty="0">
+                <a:solidFill>
+                  <a:srgbClr val="79C0FF"/>
+                </a:solidFill>
+                <a:latin typeface="Consolas" pitchFamily="34" charset="0"/>
+                <a:ea typeface="Consolas" pitchFamily="34" charset="-122"/>
+                <a:cs typeface="Consolas" pitchFamily="34" charset="-120"/>
+              </a:rPr>
+              <a:t>    print(type(numbers))        # &lt;class 'tuple'&gt;</a:t>
+            </a:r>
+            <a:endParaRPr lang="en-US" sz="1200" dirty="0"/>
+          </a:p>
+          <a:p>
+            <a:pPr marL="0" indent="0">
+              <a:buNone/>
+            </a:pPr>
+            <a:r>
+              <a:rPr lang="en-US" sz="1200" dirty="0">
+                <a:solidFill>
+                  <a:srgbClr val="4F9CF9"/>
+                </a:solidFill>
+                <a:latin typeface="Consolas" pitchFamily="34" charset="0"/>
+                <a:ea typeface="Consolas" pitchFamily="34" charset="-122"/>
+                <a:cs typeface="Consolas" pitchFamily="34" charset="-120"/>
+              </a:rPr>
+              <a:t>    return sum(numbers)</a:t>
+            </a:r>
+            <a:endParaRPr lang="en-US" sz="1200" dirty="0"/>
+          </a:p>
+          <a:p>
+            <a:pPr marL="0" indent="0">
+              <a:buNone/>
+            </a:pPr>
+            <a:endParaRPr lang="en-US" sz="1200" dirty="0"/>
+          </a:p>
+          <a:p>
+            <a:pPr marL="0" indent="0">
+              <a:buNone/>
+            </a:pPr>
+            <a:r>
+              <a:rPr lang="en-US" sz="1200" dirty="0">
+                <a:solidFill>
+                  <a:srgbClr val="79C0FF"/>
+                </a:solidFill>
+                <a:latin typeface="Consolas" pitchFamily="34" charset="0"/>
+                <a:ea typeface="Consolas" pitchFamily="34" charset="-122"/>
+                <a:cs typeface="Consolas" pitchFamily="34" charset="-120"/>
+              </a:rPr>
+              <a:t>print(add_all(1, 2))            # → 3</a:t>
+            </a:r>
+            <a:endParaRPr lang="en-US" sz="1200" dirty="0"/>
+          </a:p>
+          <a:p>
+            <a:pPr marL="0" indent="0">
+              <a:buNone/>
+            </a:pPr>
+            <a:r>
+              <a:rPr lang="en-US" sz="1200" dirty="0">
+                <a:solidFill>
+                  <a:srgbClr val="79C0FF"/>
+                </a:solidFill>
+                <a:latin typeface="Consolas" pitchFamily="34" charset="0"/>
+                <a:ea typeface="Consolas" pitchFamily="34" charset="-122"/>
+                <a:cs typeface="Consolas" pitchFamily="34" charset="-120"/>
+              </a:rPr>
+              <a:t>print(add_all(1, 2, 3, 4, 5))  # → 15</a:t>
+            </a:r>
+            <a:endParaRPr lang="en-US" sz="1200" dirty="0"/>
+          </a:p>
+          <a:p>
+            <a:pPr marL="0" indent="0">
+              <a:buNone/>
+            </a:pPr>
+            <a:r>
+              <a:rPr lang="en-US" sz="1200" dirty="0">
+                <a:solidFill>
+                  <a:srgbClr val="79C0FF"/>
+                </a:solidFill>
+                <a:latin typeface="Consolas" pitchFamily="34" charset="0"/>
+                <a:ea typeface="Consolas" pitchFamily="34" charset="-122"/>
+                <a:cs typeface="Consolas" pitchFamily="34" charset="-120"/>
+              </a:rPr>
+              <a:t>print(add_all(10, 20, 30))      # → 60</a:t>
+            </a:r>
+            <a:endParaRPr lang="en-US" sz="1200" dirty="0"/>
+          </a:p>
+          <a:p>
+            <a:pPr marL="0" indent="0">
+              <a:buNone/>
+            </a:pPr>
+            <a:endParaRPr lang="en-US" sz="1200" dirty="0"/>
+          </a:p>
+          <a:p>
+            <a:pPr marL="0" indent="0">
+              <a:buNone/>
+            </a:pPr>
+            <a:r>
+              <a:rPr lang="en-US" sz="1200" dirty="0">
+                <a:solidFill>
+                  <a:srgbClr val="6A9955"/>
+                </a:solidFill>
+                <a:latin typeface="Consolas" pitchFamily="34" charset="0"/>
+                <a:ea typeface="Consolas" pitchFamily="34" charset="-122"/>
+                <a:cs typeface="Consolas" pitchFamily="34" charset="-120"/>
+              </a:rPr>
+              <a:t># Real-world: an order system</a:t>
+            </a:r>
+            <a:endParaRPr lang="en-US" sz="1200" dirty="0"/>
+          </a:p>
+          <a:p>
+            <a:pPr marL="0" indent="0">
+              <a:buNone/>
+            </a:pPr>
+            <a:r>
+              <a:rPr lang="en-US" sz="1200" dirty="0">
+                <a:solidFill>
+                  <a:srgbClr val="4F9CF9"/>
+                </a:solidFill>
+                <a:latin typeface="Consolas" pitchFamily="34" charset="0"/>
+                <a:ea typeface="Consolas" pitchFamily="34" charset="-122"/>
+                <a:cs typeface="Consolas" pitchFamily="34" charset="-120"/>
+              </a:rPr>
+              <a:t>def describe_order(*items):</a:t>
+            </a:r>
+            <a:endParaRPr lang="en-US" sz="1200" dirty="0"/>
+          </a:p>
+          <a:p>
+            <a:pPr marL="0" indent="0">
+              <a:buNone/>
+            </a:pPr>
+            <a:r>
+              <a:rPr lang="en-US" sz="1200" dirty="0">
+                <a:solidFill>
+                  <a:srgbClr val="79C0FF"/>
+                </a:solidFill>
+                <a:latin typeface="Consolas" pitchFamily="34" charset="0"/>
+                <a:ea typeface="Consolas" pitchFamily="34" charset="-122"/>
+                <a:cs typeface="Consolas" pitchFamily="34" charset="-120"/>
+              </a:rPr>
+              <a:t>    for item in items:</a:t>
+            </a:r>
+            <a:endParaRPr lang="en-US" sz="1200" dirty="0"/>
+          </a:p>
+          <a:p>
+            <a:pPr marL="0" indent="0">
+              <a:buNone/>
+            </a:pPr>
+            <a:r>
+              <a:rPr lang="en-US" sz="1200" dirty="0">
+                <a:solidFill>
+                  <a:srgbClr val="79C0FF"/>
+                </a:solidFill>
+                <a:latin typeface="Consolas" pitchFamily="34" charset="0"/>
+                <a:ea typeface="Consolas" pitchFamily="34" charset="-122"/>
+                <a:cs typeface="Consolas" pitchFamily="34" charset="-120"/>
+              </a:rPr>
+              <a:t>        print(f'  - {item}')</a:t>
+            </a:r>
+            <a:endParaRPr lang="en-US" sz="1200" dirty="0"/>
+          </a:p>
+          <a:p>
+            <a:pPr marL="0" indent="0">
+              <a:buNone/>
+            </a:pPr>
+            <a:endParaRPr lang="en-US" sz="1200" dirty="0"/>
+          </a:p>
+          <a:p>
+            <a:pPr marL="0" indent="0">
+              <a:buNone/>
+            </a:pPr>
+            <a:r>
+              <a:rPr lang="en-US" sz="1200" dirty="0">
+                <a:solidFill>
+                  <a:srgbClr val="79C0FF"/>
+                </a:solidFill>
+                <a:latin typeface="Consolas" pitchFamily="34" charset="0"/>
+                <a:ea typeface="Consolas" pitchFamily="34" charset="-122"/>
+                <a:cs typeface="Consolas" pitchFamily="34" charset="-120"/>
+              </a:rPr>
+              <a:t>describe_order('Pizza', 'Coke', 'Garlic Bread')</a:t>
+            </a:r>
+            <a:endParaRPr lang="en-US" sz="1200" dirty="0"/>
+          </a:p>
+        </p:txBody>
+      </p:sp>
+      <p:sp>
+        <p:nvSpPr>
+          <p:cNvPr id="7" name="Shape 5"/>
+          <p:cNvSpPr/>
+          <p:nvPr/>
+        </p:nvSpPr>
+        <p:spPr>
+          <a:xfrm>
+            <a:off x="457200" y="4800600"/>
+            <a:ext cx="8229600" cy="182880"/>
+          </a:xfrm>
+          <a:prstGeom prst="rect">
+            <a:avLst/>
+          </a:prstGeom>
+          <a:solidFill>
+            <a:srgbClr val="1A1D27"/>
+          </a:solidFill>
+          <a:ln w="12700">
+            <a:solidFill>
+              <a:srgbClr val="34D399"/>
+            </a:solidFill>
+            <a:prstDash val="solid"/>
+          </a:ln>
+        </p:spPr>
+      </p:sp>
+      <p:sp>
+        <p:nvSpPr>
+          <p:cNvPr id="8" name="Text 6"/>
+          <p:cNvSpPr/>
+          <p:nvPr/>
+        </p:nvSpPr>
+        <p:spPr>
+          <a:xfrm>
+            <a:off x="640080" y="4809744"/>
+            <a:ext cx="7863840" cy="164592"/>
+          </a:xfrm>
+          <a:prstGeom prst="rect">
+            <a:avLst/>
+          </a:prstGeom>
+          <a:noFill/>
+          <a:ln/>
+        </p:spPr>
+        <p:txBody>
+          <a:bodyPr wrap="square" rtlCol="0" anchor="ctr"/>
+          <a:lstStyle/>
+          <a:p>
+            <a:pPr marL="0" indent="0">
+              <a:buNone/>
+            </a:pPr>
+            <a:r>
+              <a:rPr lang="en-US" sz="1100" dirty="0">
+                <a:solidFill>
+                  <a:srgbClr val="34D399"/>
+                </a:solidFill>
+                <a:latin typeface="Calibri" pitchFamily="34" charset="0"/>
+                <a:ea typeface="Calibri" pitchFamily="34" charset="-122"/>
+                <a:cs typeface="Calibri" pitchFamily="34" charset="-120"/>
+              </a:rPr>
+              <a:t>💡  *args is just a TUPLE. The * is the collector. You can loop it, index it — anything you do with tuples.</a:t>
+            </a:r>
+            <a:endParaRPr lang="en-US" sz="1100" dirty="0"/>
+          </a:p>
+        </p:txBody>
+      </p:sp>
+    </p:spTree>
+  </p:cSld>
+  <p:clrMapOvr>
+    <a:masterClrMapping/>
+  </p:clrMapOvr>
+</p:sld>
+</file>
+
+<file path=ppt/slides/slide9.xml><?xml version="1.0" encoding="utf-8"?>
+<p:sld xmlns:a="http://schemas.openxmlformats.org/drawingml/2006/main" xmlns:r="http://schemas.openxmlformats.org/officeDocument/2006/relationships" xmlns:p="http://schemas.openxmlformats.org/presentationml/2006/main">
+  <p:cSld name="Slide 9">
+    <p:bg>
+      <p:bgPr>
+        <a:solidFill>
+          <a:srgbClr val="0F1117"/>
+        </a:solidFill>
+        <a:effectLst/>
+      </p:bgPr>
+    </p:bg>
+    <p:spTree>
+      <p:nvGrpSpPr>
+        <p:cNvPr id="1" name=""/>
+        <p:cNvGrpSpPr/>
+        <p:nvPr/>
+      </p:nvGrpSpPr>
+      <p:grpSpPr>
+        <a:xfrm>
+          <a:off x="0" y="0"/>
+          <a:ext cx="0" cy="0"/>
+          <a:chOff x="0" y="0"/>
+          <a:chExt cx="0" cy="0"/>
+        </a:xfrm>
+      </p:grpSpPr>
+      <p:sp>
+        <p:nvSpPr>
+          <p:cNvPr id="2" name="Text 0"/>
+          <p:cNvSpPr/>
+          <p:nvPr/>
+        </p:nvSpPr>
+        <p:spPr>
+          <a:xfrm>
+            <a:off x="457200" y="274320"/>
+            <a:ext cx="8229600" cy="640080"/>
+          </a:xfrm>
+          <a:prstGeom prst="rect">
+            <a:avLst/>
+          </a:prstGeom>
+          <a:noFill/>
+          <a:ln/>
+        </p:spPr>
+        <p:txBody>
+          <a:bodyPr wrap="square" rtlCol="0" anchor="ctr"/>
+          <a:lstStyle/>
+          <a:p>
+            <a:pPr marL="0" indent="0" algn="l">
+              <a:buNone/>
+            </a:pPr>
+            <a:r>
+              <a:rPr lang="en-US" sz="3000" b="1" dirty="0">
+                <a:solidFill>
+                  <a:srgbClr val="F1F5F9"/>
+                </a:solidFill>
+                <a:latin typeface="Calibri" pitchFamily="34" charset="0"/>
+                <a:ea typeface="Calibri" pitchFamily="34" charset="-122"/>
+                <a:cs typeface="Calibri" pitchFamily="34" charset="-120"/>
+              </a:rPr>
+              <a:t>Stage 6 — **kwargs (Variable Keyword)</a:t>
+            </a:r>
+            <a:endParaRPr lang="en-US" sz="3000" dirty="0"/>
+          </a:p>
+        </p:txBody>
+      </p:sp>
+      <p:sp>
+        <p:nvSpPr>
+          <p:cNvPr id="3" name="Shape 1"/>
+          <p:cNvSpPr/>
+          <p:nvPr/>
+        </p:nvSpPr>
+        <p:spPr>
+          <a:xfrm>
+            <a:off x="457200" y="987552"/>
+            <a:ext cx="8229600" cy="36576"/>
+          </a:xfrm>
+          <a:prstGeom prst="rect">
+            <a:avLst/>
+          </a:prstGeom>
+          <a:solidFill>
+            <a:srgbClr val="A78BFA"/>
+          </a:solidFill>
+          <a:ln w="12700">
+            <a:solidFill>
+              <a:srgbClr val="A78BFA"/>
+            </a:solidFill>
+            <a:prstDash val="solid"/>
+          </a:ln>
+        </p:spPr>
+      </p:sp>
+      <p:sp>
+        <p:nvSpPr>
+          <p:cNvPr id="4" name="Text 2"/>
+          <p:cNvSpPr/>
+          <p:nvPr/>
+        </p:nvSpPr>
+        <p:spPr>
+          <a:xfrm>
+            <a:off x="457200" y="1143000"/>
+            <a:ext cx="8229600" cy="274320"/>
+          </a:xfrm>
+          <a:prstGeom prst="rect">
+            <a:avLst/>
+          </a:prstGeom>
+          <a:noFill/>
+          <a:ln/>
+        </p:spPr>
+        <p:txBody>
+          <a:bodyPr wrap="square" rtlCol="0" anchor="ctr"/>
+          <a:lstStyle/>
+          <a:p>
+            <a:pPr marL="0" indent="0">
+              <a:buNone/>
+            </a:pPr>
+            <a:r>
+              <a:rPr lang="en-US" sz="1300" i="1" dirty="0">
+                <a:solidFill>
+                  <a:srgbClr val="8B95A8"/>
+                </a:solidFill>
+                <a:latin typeface="Calibri" pitchFamily="34" charset="0"/>
+                <a:ea typeface="Calibri" pitchFamily="34" charset="-122"/>
+                <a:cs typeface="Calibri" pitchFamily="34" charset="-120"/>
+              </a:rPr>
+              <a:t>Problem: What if we don't know what named data will come in?</a:t>
+            </a:r>
+            <a:endParaRPr lang="en-US" sz="1300" dirty="0"/>
+          </a:p>
+        </p:txBody>
+      </p:sp>
+      <p:sp>
+        <p:nvSpPr>
+          <p:cNvPr id="5" name="Shape 3"/>
+          <p:cNvSpPr/>
+          <p:nvPr/>
+        </p:nvSpPr>
+        <p:spPr>
+          <a:xfrm>
+            <a:off x="457200" y="1463040"/>
+            <a:ext cx="8229600" cy="2651760"/>
+          </a:xfrm>
+          <a:prstGeom prst="rect">
+            <a:avLst/>
+          </a:prstGeom>
+          <a:solidFill>
+            <a:srgbClr val="161B22"/>
+          </a:solidFill>
+          <a:ln w="12700">
+            <a:solidFill>
+              <a:srgbClr val="4F9CF9"/>
+            </a:solidFill>
+            <a:prstDash val="solid"/>
+          </a:ln>
+        </p:spPr>
+      </p:sp>
+      <p:sp>
+        <p:nvSpPr>
+          <p:cNvPr id="6" name="Text 4"/>
+          <p:cNvSpPr/>
+          <p:nvPr/>
+        </p:nvSpPr>
+        <p:spPr>
+          <a:xfrm>
+            <a:off x="594360" y="1572768"/>
+            <a:ext cx="7955280" cy="2468880"/>
+          </a:xfrm>
+          <a:prstGeom prst="rect">
+            <a:avLst/>
+          </a:prstGeom>
+          <a:noFill/>
+          <a:ln/>
+        </p:spPr>
+        <p:txBody>
+          <a:bodyPr wrap="square" rtlCol="0" anchor="ctr"/>
+          <a:lstStyle/>
+          <a:p>
+            <a:pPr marL="0" indent="0">
+              <a:buNone/>
+            </a:pPr>
+            <a:r>
+              <a:rPr lang="en-US" sz="1200" dirty="0">
+                <a:solidFill>
+                  <a:srgbClr val="4F9CF9"/>
+                </a:solidFill>
+                <a:latin typeface="Consolas" pitchFamily="34" charset="0"/>
+                <a:ea typeface="Consolas" pitchFamily="34" charset="-122"/>
+                <a:cs typeface="Consolas" pitchFamily="34" charset="-120"/>
+              </a:rPr>
+              <a:t>def build_profile(**info):        # ** collects into a dict</a:t>
+            </a:r>
+            <a:endParaRPr lang="en-US" sz="1200" dirty="0"/>
+          </a:p>
+          <a:p>
+            <a:pPr marL="0" indent="0">
+              <a:buNone/>
+            </a:pPr>
+            <a:r>
+              <a:rPr lang="en-US" sz="1200" dirty="0">
+                <a:solidFill>
+                  <a:srgbClr val="79C0FF"/>
+                </a:solidFill>
+                <a:latin typeface="Consolas" pitchFamily="34" charset="0"/>
+                <a:ea typeface="Consolas" pitchFamily="34" charset="-122"/>
+                <a:cs typeface="Consolas" pitchFamily="34" charset="-120"/>
+              </a:rPr>
+              <a:t>    print(type(info))             # &lt;class 'dict'&gt;</a:t>
+            </a:r>
+            <a:endParaRPr lang="en-US" sz="1200" dirty="0"/>
+          </a:p>
+          <a:p>
+            <a:pPr marL="0" indent="0">
+              <a:buNone/>
+            </a:pPr>
+            <a:r>
+              <a:rPr lang="en-US" sz="1200" dirty="0">
+                <a:solidFill>
+                  <a:srgbClr val="79C0FF"/>
+                </a:solidFill>
+                <a:latin typeface="Consolas" pitchFamily="34" charset="0"/>
+                <a:ea typeface="Consolas" pitchFamily="34" charset="-122"/>
+                <a:cs typeface="Consolas" pitchFamily="34" charset="-120"/>
+              </a:rPr>
+              <a:t>    for key, value in info.items():</a:t>
+            </a:r>
+            <a:endParaRPr lang="en-US" sz="1200" dirty="0"/>
+          </a:p>
+          <a:p>
+            <a:pPr marL="0" indent="0">
+              <a:buNone/>
+            </a:pPr>
+            <a:r>
+              <a:rPr lang="en-US" sz="1200" dirty="0">
+                <a:solidFill>
+                  <a:srgbClr val="79C0FF"/>
+                </a:solidFill>
+                <a:latin typeface="Consolas" pitchFamily="34" charset="0"/>
+                <a:ea typeface="Consolas" pitchFamily="34" charset="-122"/>
+                <a:cs typeface="Consolas" pitchFamily="34" charset="-120"/>
+              </a:rPr>
+              <a:t>        print(f'{key}: {value}')</a:t>
+            </a:r>
+            <a:endParaRPr lang="en-US" sz="1200" dirty="0"/>
+          </a:p>
+          <a:p>
+            <a:pPr marL="0" indent="0">
+              <a:buNone/>
+            </a:pPr>
+            <a:endParaRPr lang="en-US" sz="1200" dirty="0"/>
+          </a:p>
+          <a:p>
+            <a:pPr marL="0" indent="0">
+              <a:buNone/>
+            </a:pPr>
+            <a:r>
+              <a:rPr lang="en-US" sz="1200" dirty="0">
+                <a:solidFill>
+                  <a:srgbClr val="79C0FF"/>
+                </a:solidFill>
+                <a:latin typeface="Consolas" pitchFamily="34" charset="0"/>
+                <a:ea typeface="Consolas" pitchFamily="34" charset="-122"/>
+                <a:cs typeface="Consolas" pitchFamily="34" charset="-120"/>
+              </a:rPr>
+              <a:t>build_profile(name='Alice', age=25, city='Bengaluru', hobby='Chess')</a:t>
+            </a:r>
+            <a:endParaRPr lang="en-US" sz="1200" dirty="0"/>
+          </a:p>
+          <a:p>
+            <a:pPr marL="0" indent="0">
+              <a:buNone/>
+            </a:pPr>
+            <a:r>
+              <a:rPr lang="en-US" sz="1200" dirty="0">
+                <a:solidFill>
+                  <a:srgbClr val="6A9955"/>
+                </a:solidFill>
+                <a:latin typeface="Consolas" pitchFamily="34" charset="0"/>
+                <a:ea typeface="Consolas" pitchFamily="34" charset="-122"/>
+                <a:cs typeface="Consolas" pitchFamily="34" charset="-120"/>
+              </a:rPr>
+              <a:t># name: Alice</a:t>
+            </a:r>
+            <a:endParaRPr lang="en-US" sz="1200" dirty="0"/>
+          </a:p>
+          <a:p>
+            <a:pPr marL="0" indent="0">
+              <a:buNone/>
+            </a:pPr>
+            <a:r>
+              <a:rPr lang="en-US" sz="1200" dirty="0">
+                <a:solidFill>
+                  <a:srgbClr val="6A9955"/>
+                </a:solidFill>
+                <a:latin typeface="Consolas" pitchFamily="34" charset="0"/>
+                <a:ea typeface="Consolas" pitchFamily="34" charset="-122"/>
+                <a:cs typeface="Consolas" pitchFamily="34" charset="-120"/>
+              </a:rPr>
+              <a:t># age: 25</a:t>
+            </a:r>
+            <a:endParaRPr lang="en-US" sz="1200" dirty="0"/>
+          </a:p>
+          <a:p>
+            <a:pPr marL="0" indent="0">
+              <a:buNone/>
+            </a:pPr>
+            <a:r>
+              <a:rPr lang="en-US" sz="1200" dirty="0">
+                <a:solidFill>
+                  <a:srgbClr val="6A9955"/>
+                </a:solidFill>
+                <a:latin typeface="Consolas" pitchFamily="34" charset="0"/>
+                <a:ea typeface="Consolas" pitchFamily="34" charset="-122"/>
+                <a:cs typeface="Consolas" pitchFamily="34" charset="-120"/>
+              </a:rPr>
+              <a:t># city: Bengaluru</a:t>
+            </a:r>
+            <a:endParaRPr lang="en-US" sz="1200" dirty="0"/>
+          </a:p>
+          <a:p>
+            <a:pPr marL="0" indent="0">
+              <a:buNone/>
+            </a:pPr>
+            <a:r>
+              <a:rPr lang="en-US" sz="1200" dirty="0">
+                <a:solidFill>
+                  <a:srgbClr val="6A9955"/>
+                </a:solidFill>
+                <a:latin typeface="Consolas" pitchFamily="34" charset="0"/>
+                <a:ea typeface="Consolas" pitchFamily="34" charset="-122"/>
+                <a:cs typeface="Consolas" pitchFamily="34" charset="-120"/>
+              </a:rPr>
+              <a:t># hobby: Chess</a:t>
+            </a:r>
+            <a:endParaRPr lang="en-US" sz="1200" dirty="0"/>
+          </a:p>
+        </p:txBody>
+      </p:sp>
+      <p:sp>
+        <p:nvSpPr>
+          <p:cNvPr id="7" name="Shape 5"/>
+          <p:cNvSpPr/>
+          <p:nvPr/>
+        </p:nvSpPr>
+        <p:spPr>
+          <a:xfrm>
+            <a:off x="457200" y="4206240"/>
+            <a:ext cx="4114800" cy="822960"/>
+          </a:xfrm>
+          <a:prstGeom prst="rect">
+            <a:avLst/>
+          </a:prstGeom>
+          <a:solidFill>
+            <a:srgbClr val="1A1D27"/>
+          </a:solidFill>
+          <a:ln w="12700">
+            <a:solidFill>
+              <a:srgbClr val="A78BFA"/>
+            </a:solidFill>
+            <a:prstDash val="solid"/>
+          </a:ln>
+        </p:spPr>
+      </p:sp>
+      <p:sp>
+        <p:nvSpPr>
+          <p:cNvPr id="8" name="Text 6"/>
+          <p:cNvSpPr/>
+          <p:nvPr/>
+        </p:nvSpPr>
+        <p:spPr>
+          <a:xfrm>
+            <a:off x="594360" y="4233672"/>
+            <a:ext cx="3840480" cy="256032"/>
+          </a:xfrm>
+          <a:prstGeom prst="rect">
+            <a:avLst/>
+          </a:prstGeom>
+          <a:noFill/>
+          <a:ln/>
+        </p:spPr>
+        <p:txBody>
+          <a:bodyPr wrap="square" rtlCol="0" anchor="ctr"/>
+          <a:lstStyle/>
+          <a:p>
+            <a:pPr marL="0" indent="0">
+              <a:buNone/>
+            </a:pPr>
+            <a:r>
+              <a:rPr lang="en-US" sz="1200" b="1" dirty="0">
+                <a:solidFill>
+                  <a:srgbClr val="A78BFA"/>
+                </a:solidFill>
+                <a:latin typeface="Calibri" pitchFamily="34" charset="0"/>
+                <a:ea typeface="Calibri" pitchFamily="34" charset="-122"/>
+                <a:cs typeface="Calibri" pitchFamily="34" charset="-120"/>
+              </a:rPr>
+              <a:t>📋  Real-world analogy</a:t>
+            </a:r>
+            <a:endParaRPr lang="en-US" sz="1200" dirty="0"/>
+          </a:p>
+        </p:txBody>
+      </p:sp>
+      <p:sp>
+        <p:nvSpPr>
+          <p:cNvPr id="9" name="Text 7"/>
+          <p:cNvSpPr/>
+          <p:nvPr/>
+        </p:nvSpPr>
+        <p:spPr>
+          <a:xfrm>
+            <a:off x="594360" y="4507992"/>
+            <a:ext cx="3840480" cy="457200"/>
+          </a:xfrm>
+          <a:prstGeom prst="rect">
+            <a:avLst/>
+          </a:prstGeom>
+          <a:noFill/>
+          <a:ln/>
+        </p:spPr>
+        <p:txBody>
+          <a:bodyPr wrap="square" rtlCol="0" anchor="ctr"/>
+          <a:lstStyle/>
+          <a:p>
+            <a:pPr marL="0" indent="0">
+              <a:buNone/>
+            </a:pPr>
+            <a:r>
+              <a:rPr lang="en-US" sz="1100" dirty="0">
+                <a:solidFill>
+                  <a:srgbClr val="F1F5F9"/>
+                </a:solidFill>
+                <a:latin typeface="Calibri" pitchFamily="34" charset="0"/>
+                <a:ea typeface="Calibri" pitchFamily="34" charset="-122"/>
+                <a:cs typeface="Calibri" pitchFamily="34" charset="-120"/>
+              </a:rPr>
+              <a:t>Like a form where you can add ANY fields — name, LinkedIn, GitHub, address — whatever you want. **kwargs is that flexible form.</a:t>
+            </a:r>
+            <a:endParaRPr lang="en-US" sz="1100" dirty="0"/>
+          </a:p>
+        </p:txBody>
+      </p:sp>
+      <p:sp>
+        <p:nvSpPr>
+          <p:cNvPr id="10" name="Shape 8"/>
+          <p:cNvSpPr/>
+          <p:nvPr/>
+        </p:nvSpPr>
+        <p:spPr>
+          <a:xfrm>
+            <a:off x="4754880" y="4206240"/>
+            <a:ext cx="3931920" cy="822960"/>
+          </a:xfrm>
+          <a:prstGeom prst="rect">
+            <a:avLst/>
+          </a:prstGeom>
+          <a:solidFill>
+            <a:srgbClr val="1A1D27"/>
+          </a:solidFill>
+          <a:ln w="12700">
+            <a:solidFill>
+              <a:srgbClr val="34D399"/>
+            </a:solidFill>
+            <a:prstDash val="solid"/>
+          </a:ln>
+        </p:spPr>
+      </p:sp>
+      <p:sp>
+        <p:nvSpPr>
+          <p:cNvPr id="11" name="Text 9"/>
+          <p:cNvSpPr/>
+          <p:nvPr/>
+        </p:nvSpPr>
+        <p:spPr>
+          <a:xfrm>
+            <a:off x="4892040" y="4233672"/>
+            <a:ext cx="3657600" cy="256032"/>
+          </a:xfrm>
+          <a:prstGeom prst="rect">
+            <a:avLst/>
+          </a:prstGeom>
+          <a:noFill/>
+          <a:ln/>
+        </p:spPr>
+        <p:txBody>
+          <a:bodyPr wrap="square" rtlCol="0" anchor="ctr"/>
+          <a:lstStyle/>
+          <a:p>
+            <a:pPr marL="0" indent="0">
+              <a:buNone/>
+            </a:pPr>
+            <a:r>
+              <a:rPr lang="en-US" sz="1200" b="1" dirty="0">
+                <a:solidFill>
+                  <a:srgbClr val="34D399"/>
+                </a:solidFill>
+                <a:latin typeface="Calibri" pitchFamily="34" charset="0"/>
+                <a:ea typeface="Calibri" pitchFamily="34" charset="-122"/>
+                <a:cs typeface="Calibri" pitchFamily="34" charset="-120"/>
+              </a:rPr>
+              <a:t>🔑  Key difference</a:t>
+            </a:r>
+            <a:endParaRPr lang="en-US" sz="1200" dirty="0"/>
+          </a:p>
+        </p:txBody>
+      </p:sp>
+      <p:sp>
+        <p:nvSpPr>
+          <p:cNvPr id="12" name="Text 10"/>
+          <p:cNvSpPr/>
+          <p:nvPr/>
+        </p:nvSpPr>
+        <p:spPr>
+          <a:xfrm>
+            <a:off x="4892040" y="4507992"/>
+            <a:ext cx="3657600" cy="457200"/>
+          </a:xfrm>
+          <a:prstGeom prst="rect">
+            <a:avLst/>
+          </a:prstGeom>
+          <a:noFill/>
+          <a:ln/>
+        </p:spPr>
+        <p:txBody>
+          <a:bodyPr wrap="square" rtlCol="0" anchor="ctr"/>
+          <a:lstStyle/>
+          <a:p>
+            <a:pPr marL="0" indent="0">
+              <a:buNone/>
+            </a:pPr>
+            <a:r>
+              <a:rPr lang="en-US" sz="1050" dirty="0">
+                <a:solidFill>
+                  <a:srgbClr val="79C0FF"/>
+                </a:solidFill>
+                <a:latin typeface="Consolas" pitchFamily="34" charset="0"/>
+                <a:ea typeface="Consolas" pitchFamily="34" charset="-122"/>
+                <a:cs typeface="Consolas" pitchFamily="34" charset="-120"/>
+              </a:rPr>
+              <a:t>*args     → unknown COUNT of values    → TUPLE</a:t>
+            </a:r>
+            <a:endParaRPr lang="en-US" sz="1050" dirty="0"/>
+          </a:p>
+          <a:p>
+            <a:pPr marL="0" indent="0">
+              <a:buNone/>
+            </a:pPr>
+            <a:r>
+              <a:rPr lang="en-US" sz="1050" dirty="0">
+                <a:solidFill>
+                  <a:srgbClr val="A78BFA"/>
+                </a:solidFill>
+                <a:latin typeface="Consolas" pitchFamily="34" charset="0"/>
+                <a:ea typeface="Consolas" pitchFamily="34" charset="-122"/>
+                <a:cs typeface="Consolas" pitchFamily="34" charset="-120"/>
+              </a:rPr>
+              <a:t>**kwargs → unknown NAME+VALUE pairs  → DICT</a:t>
+            </a:r>
+            <a:endParaRPr lang="en-US" sz="1050" dirty="0"/>
           </a:p>
         </p:txBody>
       </p:sp>
